--- a/assignment_CSCU9M5.pptx
+++ b/assignment_CSCU9M5.pptx
@@ -126,19 +126,19 @@
 <pc:chgInfo xmlns:a="http://schemas.openxmlformats.org/drawingml/2006/main" xmlns:r="http://schemas.openxmlformats.org/officeDocument/2006/relationships" xmlns:ac="http://schemas.microsoft.com/office/drawing/2013/main/command" xmlns:pc="http://schemas.microsoft.com/office/powerpoint/2013/main/command">
   <pc:docChgLst>
     <pc:chgData name="Venkata Penmetsa" userId="fb136f3b-4b0a-4b9a-88c4-9108679710cc" providerId="ADAL" clId="{5D1D206D-8F09-5220-B39A-2253563CE29E}"/>
-    <pc:docChg chg="custSel modSld">
-      <pc:chgData name="Venkata Penmetsa" userId="fb136f3b-4b0a-4b9a-88c4-9108679710cc" providerId="ADAL" clId="{5D1D206D-8F09-5220-B39A-2253563CE29E}" dt="2025-11-28T15:21:30.487" v="668" actId="20577"/>
+    <pc:docChg chg="undo custSel modSld">
+      <pc:chgData name="Venkata Penmetsa" userId="fb136f3b-4b0a-4b9a-88c4-9108679710cc" providerId="ADAL" clId="{5D1D206D-8F09-5220-B39A-2253563CE29E}" dt="2025-12-03T23:27:05.730" v="875" actId="20577"/>
       <pc:docMkLst>
         <pc:docMk/>
       </pc:docMkLst>
       <pc:sldChg chg="modSp mod">
-        <pc:chgData name="Venkata Penmetsa" userId="fb136f3b-4b0a-4b9a-88c4-9108679710cc" providerId="ADAL" clId="{5D1D206D-8F09-5220-B39A-2253563CE29E}" dt="2025-11-28T15:21:30.487" v="668" actId="20577"/>
+        <pc:chgData name="Venkata Penmetsa" userId="fb136f3b-4b0a-4b9a-88c4-9108679710cc" providerId="ADAL" clId="{5D1D206D-8F09-5220-B39A-2253563CE29E}" dt="2025-12-03T23:27:05.730" v="875" actId="20577"/>
         <pc:sldMkLst>
           <pc:docMk/>
           <pc:sldMk cId="16987582" sldId="257"/>
         </pc:sldMkLst>
         <pc:spChg chg="mod">
-          <ac:chgData name="Venkata Penmetsa" userId="fb136f3b-4b0a-4b9a-88c4-9108679710cc" providerId="ADAL" clId="{5D1D206D-8F09-5220-B39A-2253563CE29E}" dt="2025-11-28T15:21:21.809" v="664" actId="167"/>
+          <ac:chgData name="Venkata Penmetsa" userId="fb136f3b-4b0a-4b9a-88c4-9108679710cc" providerId="ADAL" clId="{5D1D206D-8F09-5220-B39A-2253563CE29E}" dt="2025-12-02T17:19:33.076" v="871" actId="20577"/>
           <ac:spMkLst>
             <pc:docMk/>
             <pc:sldMk cId="16987582" sldId="257"/>
@@ -146,15 +146,31 @@
           </ac:spMkLst>
         </pc:spChg>
         <pc:spChg chg="mod">
-          <ac:chgData name="Venkata Penmetsa" userId="fb136f3b-4b0a-4b9a-88c4-9108679710cc" providerId="ADAL" clId="{5D1D206D-8F09-5220-B39A-2253563CE29E}" dt="2025-11-28T15:21:30.487" v="668" actId="20577"/>
+          <ac:chgData name="Venkata Penmetsa" userId="fb136f3b-4b0a-4b9a-88c4-9108679710cc" providerId="ADAL" clId="{5D1D206D-8F09-5220-B39A-2253563CE29E}" dt="2025-12-03T23:27:05.730" v="875" actId="20577"/>
           <ac:spMkLst>
             <pc:docMk/>
             <pc:sldMk cId="16987582" sldId="257"/>
             <ac:spMk id="16" creationId="{303339E9-D30D-6514-92CD-6CDE78311274}"/>
           </ac:spMkLst>
         </pc:spChg>
+        <pc:spChg chg="mod">
+          <ac:chgData name="Venkata Penmetsa" userId="fb136f3b-4b0a-4b9a-88c4-9108679710cc" providerId="ADAL" clId="{5D1D206D-8F09-5220-B39A-2253563CE29E}" dt="2025-12-02T17:18:02.676" v="755" actId="1076"/>
+          <ac:spMkLst>
+            <pc:docMk/>
+            <pc:sldMk cId="16987582" sldId="257"/>
+            <ac:spMk id="18" creationId="{C388C717-AB61-4AA5-0065-CF8334987466}"/>
+          </ac:spMkLst>
+        </pc:spChg>
+        <pc:graphicFrameChg chg="mod">
+          <ac:chgData name="Venkata Penmetsa" userId="fb136f3b-4b0a-4b9a-88c4-9108679710cc" providerId="ADAL" clId="{5D1D206D-8F09-5220-B39A-2253563CE29E}" dt="2025-12-02T17:18:09.571" v="756" actId="1076"/>
+          <ac:graphicFrameMkLst>
+            <pc:docMk/>
+            <pc:sldMk cId="16987582" sldId="257"/>
+            <ac:graphicFrameMk id="7" creationId="{FBE95B7C-B010-6D30-1BB3-D0BB1817071D}"/>
+          </ac:graphicFrameMkLst>
+        </pc:graphicFrameChg>
         <pc:graphicFrameChg chg="mod modGraphic">
-          <ac:chgData name="Venkata Penmetsa" userId="fb136f3b-4b0a-4b9a-88c4-9108679710cc" providerId="ADAL" clId="{5D1D206D-8F09-5220-B39A-2253563CE29E}" dt="2025-11-28T15:21:15.140" v="663" actId="1076"/>
+          <ac:chgData name="Venkata Penmetsa" userId="fb136f3b-4b0a-4b9a-88c4-9108679710cc" providerId="ADAL" clId="{5D1D206D-8F09-5220-B39A-2253563CE29E}" dt="2025-12-02T16:59:38.992" v="754" actId="14734"/>
           <ac:graphicFrameMkLst>
             <pc:docMk/>
             <pc:sldMk cId="16987582" sldId="257"/>
@@ -5288,8 +5304,8 @@
         </p:nvSpPr>
         <p:spPr>
           <a:xfrm>
-            <a:off x="4475284" y="755611"/>
-            <a:ext cx="4767909" cy="4832092"/>
+            <a:off x="4538982" y="784321"/>
+            <a:ext cx="4767909" cy="3539430"/>
           </a:xfrm>
           <a:prstGeom prst="rect">
             <a:avLst/>
@@ -5411,70 +5427,6 @@
             </a:endParaRPr>
           </a:p>
           <a:p>
-            <a:endParaRPr lang="en-GB" sz="1200" dirty="0">
-              <a:solidFill>
-                <a:prstClr val="black"/>
-              </a:solidFill>
-              <a:latin typeface="Calibri" panose="020F0502020204030204"/>
-            </a:endParaRPr>
-          </a:p>
-          <a:p>
-            <a:endParaRPr lang="en-GB" sz="1200" dirty="0">
-              <a:solidFill>
-                <a:prstClr val="black"/>
-              </a:solidFill>
-              <a:latin typeface="Calibri" panose="020F0502020204030204"/>
-            </a:endParaRPr>
-          </a:p>
-          <a:p>
-            <a:endParaRPr lang="en-GB" sz="1200" dirty="0">
-              <a:solidFill>
-                <a:prstClr val="black"/>
-              </a:solidFill>
-              <a:latin typeface="Calibri" panose="020F0502020204030204"/>
-            </a:endParaRPr>
-          </a:p>
-          <a:p>
-            <a:endParaRPr lang="en-GB" sz="1200" dirty="0">
-              <a:solidFill>
-                <a:prstClr val="black"/>
-              </a:solidFill>
-              <a:latin typeface="Calibri" panose="020F0502020204030204"/>
-            </a:endParaRPr>
-          </a:p>
-          <a:p>
-            <a:endParaRPr lang="en-GB" sz="1200" dirty="0">
-              <a:solidFill>
-                <a:prstClr val="black"/>
-              </a:solidFill>
-              <a:latin typeface="Calibri" panose="020F0502020204030204"/>
-            </a:endParaRPr>
-          </a:p>
-          <a:p>
-            <a:endParaRPr lang="en-GB" sz="1200" dirty="0">
-              <a:solidFill>
-                <a:prstClr val="black"/>
-              </a:solidFill>
-              <a:latin typeface="Calibri" panose="020F0502020204030204"/>
-            </a:endParaRPr>
-          </a:p>
-          <a:p>
-            <a:endParaRPr lang="en-GB" sz="1200" dirty="0">
-              <a:solidFill>
-                <a:prstClr val="black"/>
-              </a:solidFill>
-              <a:latin typeface="Calibri" panose="020F0502020204030204"/>
-            </a:endParaRPr>
-          </a:p>
-          <a:p>
-            <a:endParaRPr lang="en-GB" sz="1200" dirty="0">
-              <a:solidFill>
-                <a:prstClr val="black"/>
-              </a:solidFill>
-              <a:latin typeface="Calibri" panose="020F0502020204030204"/>
-            </a:endParaRPr>
-          </a:p>
-          <a:p>
             <a:r>
               <a:rPr lang="en-GB" sz="1200" dirty="0">
                 <a:solidFill>
@@ -5482,7 +5434,25 @@
                 </a:solidFill>
                 <a:latin typeface="Calibri" panose="020F0502020204030204"/>
               </a:rPr>
-              <a:t>All the environmental measurements are treated as continuous numerical variables. The month attribute was treated as nominal categorical variable and the target area is treated as binary categorical variable. Only variables which would help us predicting the fire spread have been used. </a:t>
+              <a:t>All the environmental measurements are treated as continuous numerical variables. The month attribute was treated as nominal categorical variable and the target area is treated as binary categorical variable. Only variables which would help us predicting the fire spread have been used. The rain </a:t>
+            </a:r>
+            <a:r>
+              <a:rPr lang="en-GB" sz="1200" dirty="0" err="1">
+                <a:solidFill>
+                  <a:prstClr val="black"/>
+                </a:solidFill>
+                <a:latin typeface="Calibri" panose="020F0502020204030204"/>
+              </a:rPr>
+              <a:t>varable</a:t>
+            </a:r>
+            <a:r>
+              <a:rPr lang="en-GB" sz="1200" dirty="0">
+                <a:solidFill>
+                  <a:prstClr val="black"/>
+                </a:solidFill>
+                <a:latin typeface="Calibri" panose="020F0502020204030204"/>
+              </a:rPr>
+              <a:t> is removed as most of the values are zero </a:t>
             </a:r>
           </a:p>
           <a:p>
@@ -5509,7 +5479,7 @@
         </p:nvSpPr>
         <p:spPr>
           <a:xfrm>
-            <a:off x="525101" y="6703042"/>
+            <a:off x="523856" y="6208027"/>
             <a:ext cx="8848120" cy="2185214"/>
           </a:xfrm>
           <a:prstGeom prst="rect">
@@ -5565,7 +5535,7 @@
               </a:rPr>
               <a:t>5. Model Training and Hyper Parameters</a:t>
             </a:r>
-            <a:endParaRPr lang="en-GB" sz="2000" b="0" i="0" u="none" strike="noStrike" kern="1200" cap="none" spc="0" normalizeH="0" baseline="0" noProof="0">
+            <a:endParaRPr lang="en-GB" sz="2000" b="0" i="0" u="none" strike="noStrike" kern="1200" cap="none" spc="0" normalizeH="0" baseline="0" noProof="0" dirty="0">
               <a:ln>
                 <a:noFill/>
               </a:ln>
@@ -6339,13 +6309,13 @@
           <p:nvPr>
             <p:extLst>
               <p:ext uri="{D42A27DB-BD31-4B8C-83A1-F6EECF244321}">
-                <p14:modId xmlns:p14="http://schemas.microsoft.com/office/powerpoint/2010/main" val="11063398"/>
+                <p14:modId xmlns:p14="http://schemas.microsoft.com/office/powerpoint/2010/main" val="512623820"/>
               </p:ext>
             </p:extLst>
           </p:nvPr>
         </p:nvGraphicFramePr>
         <p:xfrm>
-          <a:off x="4775726" y="6931436"/>
+          <a:off x="4863387" y="6716562"/>
           <a:ext cx="4443504" cy="1737360"/>
         </p:xfrm>
         <a:graphic>
@@ -7262,39 +7232,8 @@
                 <a:ea typeface="+mn-ea"/>
                 <a:cs typeface="+mn-cs"/>
               </a:rPr>
-              <a:t>4. </a:t>
-            </a:r>
-            <a:r>
-              <a:rPr kumimoji="0" lang="en-GB" sz="2000" b="0" i="0" u="none" strike="noStrike" kern="1200" cap="none" spc="0" normalizeH="0" baseline="0" noProof="0">
-                <a:ln>
-                  <a:noFill/>
-                </a:ln>
-                <a:solidFill>
-                  <a:prstClr val="black"/>
-                </a:solidFill>
-                <a:effectLst/>
-                <a:uLnTx/>
-                <a:uFillTx/>
-                <a:latin typeface="Calibri" panose="020F0502020204030204"/>
-                <a:ea typeface="+mn-ea"/>
-                <a:cs typeface="+mn-cs"/>
-              </a:rPr>
-              <a:t>Data Preparation</a:t>
-            </a:r>
-            <a:endParaRPr kumimoji="0" lang="en-GB" sz="2000" b="0" i="0" u="none" strike="noStrike" kern="1200" cap="none" spc="0" normalizeH="0" baseline="0" noProof="0" dirty="0">
-              <a:ln>
-                <a:noFill/>
-              </a:ln>
-              <a:solidFill>
-                <a:prstClr val="black"/>
-              </a:solidFill>
-              <a:effectLst/>
-              <a:uLnTx/>
-              <a:uFillTx/>
-              <a:latin typeface="Calibri" panose="020F0502020204030204"/>
-              <a:ea typeface="+mn-ea"/>
-              <a:cs typeface="+mn-cs"/>
-            </a:endParaRPr>
+              <a:t>4. Data Preparation   </a:t>
+            </a:r>
           </a:p>
           <a:p>
             <a:pPr marL="0" marR="0" lvl="0" indent="0" algn="l" defTabSz="1706910" rtl="0" eaLnBrk="1" fontAlgn="auto" latinLnBrk="0" hangingPunct="1">
@@ -7479,8 +7418,39 @@
                 <a:ea typeface="+mn-ea"/>
                 <a:cs typeface="+mn-cs"/>
               </a:rPr>
-              <a:t>that needs to be cleaned!!</a:t>
-            </a:r>
+              <a:t>that needs to be </a:t>
+            </a:r>
+            <a:r>
+              <a:rPr kumimoji="0" lang="en-GB" sz="1050" b="0" i="0" u="none" strike="noStrike" kern="1200" cap="none" spc="0" normalizeH="0" baseline="0" noProof="0">
+                <a:ln>
+                  <a:noFill/>
+                </a:ln>
+                <a:solidFill>
+                  <a:prstClr val="black"/>
+                </a:solidFill>
+                <a:effectLst/>
+                <a:uLnTx/>
+                <a:uFillTx/>
+                <a:latin typeface="Calibri" panose="020F0502020204030204"/>
+                <a:ea typeface="+mn-ea"/>
+                <a:cs typeface="+mn-cs"/>
+              </a:rPr>
+              <a:t>cleaned!!    </a:t>
+            </a:r>
+            <a:endParaRPr kumimoji="0" lang="en-GB" sz="1050" b="0" i="0" u="none" strike="noStrike" kern="1200" cap="none" spc="0" normalizeH="0" baseline="0" noProof="0" dirty="0">
+              <a:ln>
+                <a:noFill/>
+              </a:ln>
+              <a:solidFill>
+                <a:prstClr val="black"/>
+              </a:solidFill>
+              <a:effectLst/>
+              <a:uLnTx/>
+              <a:uFillTx/>
+              <a:latin typeface="Calibri" panose="020F0502020204030204"/>
+              <a:ea typeface="+mn-ea"/>
+              <a:cs typeface="+mn-cs"/>
+            </a:endParaRPr>
           </a:p>
           <a:p>
             <a:pPr marL="0" marR="0" lvl="0" indent="0" algn="l" defTabSz="1706910" rtl="0" eaLnBrk="1" fontAlgn="auto" latinLnBrk="0" hangingPunct="1">
@@ -8079,14 +8049,14 @@
           <p:nvPr>
             <p:extLst>
               <p:ext uri="{D42A27DB-BD31-4B8C-83A1-F6EECF244321}">
-                <p14:modId xmlns:p14="http://schemas.microsoft.com/office/powerpoint/2010/main" val="2455559291"/>
+                <p14:modId xmlns:p14="http://schemas.microsoft.com/office/powerpoint/2010/main" val="3052331238"/>
               </p:ext>
             </p:extLst>
           </p:nvPr>
         </p:nvGraphicFramePr>
         <p:xfrm>
           <a:off x="4775726" y="1392092"/>
-          <a:ext cx="4116658" cy="3017520"/>
+          <a:ext cx="4116658" cy="1571469"/>
         </p:xfrm>
         <a:graphic>
           <a:graphicData uri="http://schemas.openxmlformats.org/drawingml/2006/table">
@@ -8110,7 +8080,7 @@
                   </a:extLst>
                 </a:gridCol>
               </a:tblGrid>
-              <a:tr h="229871">
+              <a:tr h="352246">
                 <a:tc>
                   <a:txBody>
                     <a:bodyPr/>
@@ -8145,7 +8115,7 @@
                   </a:ext>
                 </a:extLst>
               </a:tr>
-              <a:tr h="229871">
+              <a:tr h="352246">
                 <a:tc>
                   <a:txBody>
                     <a:bodyPr/>
@@ -8180,7 +8150,7 @@
                   </a:ext>
                 </a:extLst>
               </a:tr>
-              <a:tr h="229871">
+              <a:tr h="514731">
                 <a:tc>
                   <a:txBody>
                     <a:bodyPr/>
@@ -8189,7 +8159,7 @@
                       <a:pPr algn="ctr"/>
                       <a:r>
                         <a:rPr lang="en-US" sz="1200" dirty="0"/>
-                        <a:t>FFMC</a:t>
+                        <a:t>FFMC, DMC, DC,ISI, TEMP, RH, WIND</a:t>
                       </a:r>
                     </a:p>
                   </a:txBody>
@@ -8215,364 +8185,7 @@
                   </a:ext>
                 </a:extLst>
               </a:tr>
-              <a:tr h="229871">
-                <a:tc>
-                  <a:txBody>
-                    <a:bodyPr/>
-                    <a:lstStyle/>
-                    <a:p>
-                      <a:pPr algn="ctr"/>
-                      <a:r>
-                        <a:rPr lang="en-US" sz="1200" dirty="0"/>
-                        <a:t>DMC</a:t>
-                      </a:r>
-                    </a:p>
-                  </a:txBody>
-                  <a:tcPr/>
-                </a:tc>
-                <a:tc>
-                  <a:txBody>
-                    <a:bodyPr/>
-                    <a:lstStyle/>
-                    <a:p>
-                      <a:pPr marL="0" marR="0" lvl="0" indent="0" algn="ctr" defTabSz="1706910" rtl="0" eaLnBrk="1" fontAlgn="auto" latinLnBrk="0" hangingPunct="1">
-                        <a:lnSpc>
-                          <a:spcPct val="100000"/>
-                        </a:lnSpc>
-                        <a:spcBef>
-                          <a:spcPts val="0"/>
-                        </a:spcBef>
-                        <a:spcAft>
-                          <a:spcPts val="0"/>
-                        </a:spcAft>
-                        <a:buClrTx/>
-                        <a:buSzTx/>
-                        <a:buFontTx/>
-                        <a:buNone/>
-                        <a:tabLst/>
-                        <a:defRPr/>
-                      </a:pPr>
-                      <a:r>
-                        <a:rPr lang="en-US" sz="1200" dirty="0"/>
-                        <a:t>Numeric (continuous )</a:t>
-                      </a:r>
-                    </a:p>
-                  </a:txBody>
-                  <a:tcPr/>
-                </a:tc>
-                <a:extLst>
-                  <a:ext uri="{0D108BD9-81ED-4DB2-BD59-A6C34878D82A}">
-                    <a16:rowId xmlns:a16="http://schemas.microsoft.com/office/drawing/2014/main" val="384706957"/>
-                  </a:ext>
-                </a:extLst>
-              </a:tr>
-              <a:tr h="229871">
-                <a:tc>
-                  <a:txBody>
-                    <a:bodyPr/>
-                    <a:lstStyle/>
-                    <a:p>
-                      <a:pPr algn="ctr"/>
-                      <a:r>
-                        <a:rPr lang="en-US" sz="1200" dirty="0"/>
-                        <a:t>DC</a:t>
-                      </a:r>
-                    </a:p>
-                  </a:txBody>
-                  <a:tcPr/>
-                </a:tc>
-                <a:tc>
-                  <a:txBody>
-                    <a:bodyPr/>
-                    <a:lstStyle/>
-                    <a:p>
-                      <a:pPr marL="0" marR="0" lvl="0" indent="0" algn="ctr" defTabSz="1706910" rtl="0" eaLnBrk="1" fontAlgn="auto" latinLnBrk="0" hangingPunct="1">
-                        <a:lnSpc>
-                          <a:spcPct val="100000"/>
-                        </a:lnSpc>
-                        <a:spcBef>
-                          <a:spcPts val="0"/>
-                        </a:spcBef>
-                        <a:spcAft>
-                          <a:spcPts val="0"/>
-                        </a:spcAft>
-                        <a:buClrTx/>
-                        <a:buSzTx/>
-                        <a:buFontTx/>
-                        <a:buNone/>
-                        <a:tabLst/>
-                        <a:defRPr/>
-                      </a:pPr>
-                      <a:r>
-                        <a:rPr lang="en-US" sz="1200" dirty="0"/>
-                        <a:t>Numeric (continuous )</a:t>
-                      </a:r>
-                    </a:p>
-                  </a:txBody>
-                  <a:tcPr/>
-                </a:tc>
-                <a:extLst>
-                  <a:ext uri="{0D108BD9-81ED-4DB2-BD59-A6C34878D82A}">
-                    <a16:rowId xmlns:a16="http://schemas.microsoft.com/office/drawing/2014/main" val="3616807086"/>
-                  </a:ext>
-                </a:extLst>
-              </a:tr>
-              <a:tr h="229871">
-                <a:tc>
-                  <a:txBody>
-                    <a:bodyPr/>
-                    <a:lstStyle/>
-                    <a:p>
-                      <a:pPr algn="ctr"/>
-                      <a:r>
-                        <a:rPr lang="en-US" sz="1200" dirty="0"/>
-                        <a:t>ISI</a:t>
-                      </a:r>
-                    </a:p>
-                  </a:txBody>
-                  <a:tcPr/>
-                </a:tc>
-                <a:tc>
-                  <a:txBody>
-                    <a:bodyPr/>
-                    <a:lstStyle/>
-                    <a:p>
-                      <a:pPr marL="0" marR="0" lvl="0" indent="0" algn="ctr" defTabSz="1706910" rtl="0" eaLnBrk="1" fontAlgn="auto" latinLnBrk="0" hangingPunct="1">
-                        <a:lnSpc>
-                          <a:spcPct val="100000"/>
-                        </a:lnSpc>
-                        <a:spcBef>
-                          <a:spcPts val="0"/>
-                        </a:spcBef>
-                        <a:spcAft>
-                          <a:spcPts val="0"/>
-                        </a:spcAft>
-                        <a:buClrTx/>
-                        <a:buSzTx/>
-                        <a:buFontTx/>
-                        <a:buNone/>
-                        <a:tabLst/>
-                        <a:defRPr/>
-                      </a:pPr>
-                      <a:r>
-                        <a:rPr lang="en-US" sz="1200" dirty="0"/>
-                        <a:t>Numeric (continuous )</a:t>
-                      </a:r>
-                    </a:p>
-                  </a:txBody>
-                  <a:tcPr/>
-                </a:tc>
-                <a:extLst>
-                  <a:ext uri="{0D108BD9-81ED-4DB2-BD59-A6C34878D82A}">
-                    <a16:rowId xmlns:a16="http://schemas.microsoft.com/office/drawing/2014/main" val="1238404998"/>
-                  </a:ext>
-                </a:extLst>
-              </a:tr>
-              <a:tr h="229871">
-                <a:tc>
-                  <a:txBody>
-                    <a:bodyPr/>
-                    <a:lstStyle/>
-                    <a:p>
-                      <a:pPr algn="ctr"/>
-                      <a:r>
-                        <a:rPr lang="en-US" sz="1200" dirty="0"/>
-                        <a:t>Temp</a:t>
-                      </a:r>
-                    </a:p>
-                  </a:txBody>
-                  <a:tcPr/>
-                </a:tc>
-                <a:tc>
-                  <a:txBody>
-                    <a:bodyPr/>
-                    <a:lstStyle/>
-                    <a:p>
-                      <a:pPr marL="0" marR="0" lvl="0" indent="0" algn="ctr" defTabSz="1706910" rtl="0" eaLnBrk="1" fontAlgn="auto" latinLnBrk="0" hangingPunct="1">
-                        <a:lnSpc>
-                          <a:spcPct val="100000"/>
-                        </a:lnSpc>
-                        <a:spcBef>
-                          <a:spcPts val="0"/>
-                        </a:spcBef>
-                        <a:spcAft>
-                          <a:spcPts val="0"/>
-                        </a:spcAft>
-                        <a:buClrTx/>
-                        <a:buSzTx/>
-                        <a:buFontTx/>
-                        <a:buNone/>
-                        <a:tabLst/>
-                        <a:defRPr/>
-                      </a:pPr>
-                      <a:r>
-                        <a:rPr lang="en-US" sz="1200" dirty="0"/>
-                        <a:t>Numeric (continuous )</a:t>
-                      </a:r>
-                    </a:p>
-                  </a:txBody>
-                  <a:tcPr/>
-                </a:tc>
-                <a:extLst>
-                  <a:ext uri="{0D108BD9-81ED-4DB2-BD59-A6C34878D82A}">
-                    <a16:rowId xmlns:a16="http://schemas.microsoft.com/office/drawing/2014/main" val="1421764954"/>
-                  </a:ext>
-                </a:extLst>
-              </a:tr>
-              <a:tr h="229871">
-                <a:tc>
-                  <a:txBody>
-                    <a:bodyPr/>
-                    <a:lstStyle/>
-                    <a:p>
-                      <a:pPr algn="ctr"/>
-                      <a:r>
-                        <a:rPr lang="en-US" sz="1200" dirty="0"/>
-                        <a:t>RH</a:t>
-                      </a:r>
-                    </a:p>
-                  </a:txBody>
-                  <a:tcPr/>
-                </a:tc>
-                <a:tc>
-                  <a:txBody>
-                    <a:bodyPr/>
-                    <a:lstStyle/>
-                    <a:p>
-                      <a:pPr marL="0" marR="0" lvl="0" indent="0" algn="ctr" defTabSz="1706910" rtl="0" eaLnBrk="1" fontAlgn="auto" latinLnBrk="0" hangingPunct="1">
-                        <a:lnSpc>
-                          <a:spcPct val="100000"/>
-                        </a:lnSpc>
-                        <a:spcBef>
-                          <a:spcPts val="0"/>
-                        </a:spcBef>
-                        <a:spcAft>
-                          <a:spcPts val="0"/>
-                        </a:spcAft>
-                        <a:buClrTx/>
-                        <a:buSzTx/>
-                        <a:buFontTx/>
-                        <a:buNone/>
-                        <a:tabLst/>
-                        <a:defRPr/>
-                      </a:pPr>
-                      <a:r>
-                        <a:rPr lang="en-US" sz="1200" dirty="0"/>
-                        <a:t>Numeric (continuous )</a:t>
-                      </a:r>
-                    </a:p>
-                  </a:txBody>
-                  <a:tcPr/>
-                </a:tc>
-                <a:extLst>
-                  <a:ext uri="{0D108BD9-81ED-4DB2-BD59-A6C34878D82A}">
-                    <a16:rowId xmlns:a16="http://schemas.microsoft.com/office/drawing/2014/main" val="1147486166"/>
-                  </a:ext>
-                </a:extLst>
-              </a:tr>
-              <a:tr h="229871">
-                <a:tc>
-                  <a:txBody>
-                    <a:bodyPr/>
-                    <a:lstStyle/>
-                    <a:p>
-                      <a:pPr algn="ctr"/>
-                      <a:r>
-                        <a:rPr lang="en-US" sz="1200" dirty="0"/>
-                        <a:t>Wind</a:t>
-                      </a:r>
-                    </a:p>
-                  </a:txBody>
-                  <a:tcPr/>
-                </a:tc>
-                <a:tc>
-                  <a:txBody>
-                    <a:bodyPr/>
-                    <a:lstStyle/>
-                    <a:p>
-                      <a:pPr marL="0" marR="0" lvl="0" indent="0" algn="ctr" defTabSz="1706910" rtl="0" eaLnBrk="1" fontAlgn="auto" latinLnBrk="0" hangingPunct="1">
-                        <a:lnSpc>
-                          <a:spcPct val="100000"/>
-                        </a:lnSpc>
-                        <a:spcBef>
-                          <a:spcPts val="0"/>
-                        </a:spcBef>
-                        <a:spcAft>
-                          <a:spcPts val="0"/>
-                        </a:spcAft>
-                        <a:buClrTx/>
-                        <a:buSzTx/>
-                        <a:buFontTx/>
-                        <a:buNone/>
-                        <a:tabLst/>
-                        <a:defRPr/>
-                      </a:pPr>
-                      <a:r>
-                        <a:rPr lang="en-US" sz="1200" dirty="0"/>
-                        <a:t>Numeric (continuous )</a:t>
-                      </a:r>
-                    </a:p>
-                  </a:txBody>
-                  <a:tcPr/>
-                </a:tc>
-                <a:extLst>
-                  <a:ext uri="{0D108BD9-81ED-4DB2-BD59-A6C34878D82A}">
-                    <a16:rowId xmlns:a16="http://schemas.microsoft.com/office/drawing/2014/main" val="3446868149"/>
-                  </a:ext>
-                </a:extLst>
-              </a:tr>
-              <a:tr h="229871">
-                <a:tc>
-                  <a:txBody>
-                    <a:bodyPr/>
-                    <a:lstStyle/>
-                    <a:p>
-                      <a:pPr algn="ctr"/>
-                      <a:r>
-                        <a:rPr lang="en-US" sz="1200" dirty="0"/>
-                        <a:t>rain</a:t>
-                      </a:r>
-                    </a:p>
-                  </a:txBody>
-                  <a:tcPr/>
-                </a:tc>
-                <a:tc>
-                  <a:txBody>
-                    <a:bodyPr/>
-                    <a:lstStyle/>
-                    <a:p>
-                      <a:pPr marL="0" marR="0" lvl="0" indent="0" algn="ctr" defTabSz="1706910" rtl="0" eaLnBrk="1" fontAlgn="auto" latinLnBrk="0" hangingPunct="1">
-                        <a:lnSpc>
-                          <a:spcPct val="100000"/>
-                        </a:lnSpc>
-                        <a:spcBef>
-                          <a:spcPts val="0"/>
-                        </a:spcBef>
-                        <a:spcAft>
-                          <a:spcPts val="0"/>
-                        </a:spcAft>
-                        <a:buClrTx/>
-                        <a:buSzTx/>
-                        <a:buFontTx/>
-                        <a:buNone/>
-                        <a:tabLst/>
-                        <a:defRPr/>
-                      </a:pPr>
-                      <a:r>
-                        <a:rPr lang="en-US" sz="1200" dirty="0"/>
-                        <a:t>Numeric (continuous )</a:t>
-                      </a:r>
-                    </a:p>
-                  </a:txBody>
-                  <a:tcPr/>
-                </a:tc>
-                <a:extLst>
-                  <a:ext uri="{0D108BD9-81ED-4DB2-BD59-A6C34878D82A}">
-                    <a16:rowId xmlns:a16="http://schemas.microsoft.com/office/drawing/2014/main" val="2982102271"/>
-                  </a:ext>
-                </a:extLst>
-              </a:tr>
-              <a:tr h="229871">
+              <a:tr h="352246">
                 <a:tc>
                   <a:txBody>
                     <a:bodyPr/>

--- a/assignment_CSCU9M5.pptx
+++ b/assignment_CSCU9M5.pptx
@@ -4,6 +4,9 @@
   <p:sldMasterIdLst>
     <p:sldMasterId id="2147483648" r:id="rId4"/>
   </p:sldMasterIdLst>
+  <p:notesMasterIdLst>
+    <p:notesMasterId r:id="rId8"/>
+  </p:notesMasterIdLst>
   <p:sldIdLst>
     <p:sldId id="256" r:id="rId5"/>
     <p:sldId id="257" r:id="rId6"/>
@@ -117,7 +120,7 @@
 <file path=ppt/revisionInfo.xml><?xml version="1.0" encoding="utf-8"?>
 <p1510:revInfo xmlns:a="http://schemas.openxmlformats.org/drawingml/2006/main" xmlns:r="http://schemas.openxmlformats.org/officeDocument/2006/relationships" xmlns:p1510="http://schemas.microsoft.com/office/powerpoint/2015/10/main">
   <p1510:revLst>
-    <p1510:client id="{B976ACA7-2849-6B43-AD52-A2120D8AE467}" v="2" dt="2025-11-28T15:21:21.810"/>
+    <p1510:client id="{B976ACA7-2849-6B43-AD52-A2120D8AE467}" v="11" dt="2025-12-04T23:12:14.173"/>
   </p1510:revLst>
 </p1510:revInfo>
 </file>
@@ -127,18 +130,49 @@
   <pc:docChgLst>
     <pc:chgData name="Venkata Penmetsa" userId="fb136f3b-4b0a-4b9a-88c4-9108679710cc" providerId="ADAL" clId="{5D1D206D-8F09-5220-B39A-2253563CE29E}"/>
     <pc:docChg chg="undo custSel modSld">
-      <pc:chgData name="Venkata Penmetsa" userId="fb136f3b-4b0a-4b9a-88c4-9108679710cc" providerId="ADAL" clId="{5D1D206D-8F09-5220-B39A-2253563CE29E}" dt="2025-12-03T23:27:05.730" v="875" actId="20577"/>
+      <pc:chgData name="Venkata Penmetsa" userId="fb136f3b-4b0a-4b9a-88c4-9108679710cc" providerId="ADAL" clId="{5D1D206D-8F09-5220-B39A-2253563CE29E}" dt="2025-12-05T00:00:34.473" v="4450" actId="20577"/>
       <pc:docMkLst>
         <pc:docMk/>
       </pc:docMkLst>
       <pc:sldChg chg="modSp mod">
-        <pc:chgData name="Venkata Penmetsa" userId="fb136f3b-4b0a-4b9a-88c4-9108679710cc" providerId="ADAL" clId="{5D1D206D-8F09-5220-B39A-2253563CE29E}" dt="2025-12-03T23:27:05.730" v="875" actId="20577"/>
+        <pc:chgData name="Venkata Penmetsa" userId="fb136f3b-4b0a-4b9a-88c4-9108679710cc" providerId="ADAL" clId="{5D1D206D-8F09-5220-B39A-2253563CE29E}" dt="2025-12-04T22:22:48.510" v="3476" actId="20577"/>
+        <pc:sldMkLst>
+          <pc:docMk/>
+          <pc:sldMk cId="1501710403" sldId="256"/>
+        </pc:sldMkLst>
+        <pc:graphicFrameChg chg="modGraphic">
+          <ac:chgData name="Venkata Penmetsa" userId="fb136f3b-4b0a-4b9a-88c4-9108679710cc" providerId="ADAL" clId="{5D1D206D-8F09-5220-B39A-2253563CE29E}" dt="2025-12-04T22:22:48.510" v="3476" actId="20577"/>
+          <ac:graphicFrameMkLst>
+            <pc:docMk/>
+            <pc:sldMk cId="1501710403" sldId="256"/>
+            <ac:graphicFrameMk id="4" creationId="{5C505450-C5E0-1B5C-6748-4D78433A1E86}"/>
+          </ac:graphicFrameMkLst>
+        </pc:graphicFrameChg>
+      </pc:sldChg>
+      <pc:sldChg chg="addSp delSp modSp mod">
+        <pc:chgData name="Venkata Penmetsa" userId="fb136f3b-4b0a-4b9a-88c4-9108679710cc" providerId="ADAL" clId="{5D1D206D-8F09-5220-B39A-2253563CE29E}" dt="2025-12-05T00:00:34.473" v="4450" actId="20577"/>
         <pc:sldMkLst>
           <pc:docMk/>
           <pc:sldMk cId="16987582" sldId="257"/>
         </pc:sldMkLst>
         <pc:spChg chg="mod">
-          <ac:chgData name="Venkata Penmetsa" userId="fb136f3b-4b0a-4b9a-88c4-9108679710cc" providerId="ADAL" clId="{5D1D206D-8F09-5220-B39A-2253563CE29E}" dt="2025-12-02T17:19:33.076" v="871" actId="20577"/>
+          <ac:chgData name="Venkata Penmetsa" userId="fb136f3b-4b0a-4b9a-88c4-9108679710cc" providerId="ADAL" clId="{5D1D206D-8F09-5220-B39A-2253563CE29E}" dt="2025-12-05T00:00:34.473" v="4450" actId="20577"/>
+          <ac:spMkLst>
+            <pc:docMk/>
+            <pc:sldMk cId="16987582" sldId="257"/>
+            <ac:spMk id="3" creationId="{483CDE9C-72DC-E883-E910-51206EB5A594}"/>
+          </ac:spMkLst>
+        </pc:spChg>
+        <pc:spChg chg="mod">
+          <ac:chgData name="Venkata Penmetsa" userId="fb136f3b-4b0a-4b9a-88c4-9108679710cc" providerId="ADAL" clId="{5D1D206D-8F09-5220-B39A-2253563CE29E}" dt="2025-12-04T22:35:40.488" v="3731" actId="20577"/>
+          <ac:spMkLst>
+            <pc:docMk/>
+            <pc:sldMk cId="16987582" sldId="257"/>
+            <ac:spMk id="13" creationId="{CA1EAAA5-A1A2-3B0D-12F1-60B2E50A677D}"/>
+          </ac:spMkLst>
+        </pc:spChg>
+        <pc:spChg chg="mod">
+          <ac:chgData name="Venkata Penmetsa" userId="fb136f3b-4b0a-4b9a-88c4-9108679710cc" providerId="ADAL" clId="{5D1D206D-8F09-5220-B39A-2253563CE29E}" dt="2025-12-04T16:56:49.625" v="1953" actId="20577"/>
           <ac:spMkLst>
             <pc:docMk/>
             <pc:sldMk cId="16987582" sldId="257"/>
@@ -146,7 +180,7 @@
           </ac:spMkLst>
         </pc:spChg>
         <pc:spChg chg="mod">
-          <ac:chgData name="Venkata Penmetsa" userId="fb136f3b-4b0a-4b9a-88c4-9108679710cc" providerId="ADAL" clId="{5D1D206D-8F09-5220-B39A-2253563CE29E}" dt="2025-12-03T23:27:05.730" v="875" actId="20577"/>
+          <ac:chgData name="Venkata Penmetsa" userId="fb136f3b-4b0a-4b9a-88c4-9108679710cc" providerId="ADAL" clId="{5D1D206D-8F09-5220-B39A-2253563CE29E}" dt="2025-12-04T17:27:21.889" v="2667" actId="1076"/>
           <ac:spMkLst>
             <pc:docMk/>
             <pc:sldMk cId="16987582" sldId="257"/>
@@ -154,15 +188,39 @@
           </ac:spMkLst>
         </pc:spChg>
         <pc:spChg chg="mod">
-          <ac:chgData name="Venkata Penmetsa" userId="fb136f3b-4b0a-4b9a-88c4-9108679710cc" providerId="ADAL" clId="{5D1D206D-8F09-5220-B39A-2253563CE29E}" dt="2025-12-02T17:18:02.676" v="755" actId="1076"/>
+          <ac:chgData name="Venkata Penmetsa" userId="fb136f3b-4b0a-4b9a-88c4-9108679710cc" providerId="ADAL" clId="{5D1D206D-8F09-5220-B39A-2253563CE29E}" dt="2025-12-04T20:59:14.422" v="3119" actId="1076"/>
           <ac:spMkLst>
             <pc:docMk/>
             <pc:sldMk cId="16987582" sldId="257"/>
             <ac:spMk id="18" creationId="{C388C717-AB61-4AA5-0065-CF8334987466}"/>
           </ac:spMkLst>
         </pc:spChg>
-        <pc:graphicFrameChg chg="mod">
-          <ac:chgData name="Venkata Penmetsa" userId="fb136f3b-4b0a-4b9a-88c4-9108679710cc" providerId="ADAL" clId="{5D1D206D-8F09-5220-B39A-2253563CE29E}" dt="2025-12-02T17:18:09.571" v="756" actId="1076"/>
+        <pc:spChg chg="mod">
+          <ac:chgData name="Venkata Penmetsa" userId="fb136f3b-4b0a-4b9a-88c4-9108679710cc" providerId="ADAL" clId="{5D1D206D-8F09-5220-B39A-2253563CE29E}" dt="2025-12-04T23:42:33.752" v="4447" actId="20577"/>
+          <ac:spMkLst>
+            <pc:docMk/>
+            <pc:sldMk cId="16987582" sldId="257"/>
+            <ac:spMk id="20" creationId="{5F922132-ED33-E59C-B714-DBB27B5DF6F8}"/>
+          </ac:spMkLst>
+        </pc:spChg>
+        <pc:spChg chg="del mod">
+          <ac:chgData name="Venkata Penmetsa" userId="fb136f3b-4b0a-4b9a-88c4-9108679710cc" providerId="ADAL" clId="{5D1D206D-8F09-5220-B39A-2253563CE29E}" dt="2025-12-04T23:42:31.774" v="4444" actId="21"/>
+          <ac:spMkLst>
+            <pc:docMk/>
+            <pc:sldMk cId="16987582" sldId="257"/>
+            <ac:spMk id="22" creationId="{A963A857-22CD-BC85-9293-B211890D5A3A}"/>
+          </ac:spMkLst>
+        </pc:spChg>
+        <pc:graphicFrameChg chg="del modGraphic">
+          <ac:chgData name="Venkata Penmetsa" userId="fb136f3b-4b0a-4b9a-88c4-9108679710cc" providerId="ADAL" clId="{5D1D206D-8F09-5220-B39A-2253563CE29E}" dt="2025-12-04T23:10:29.658" v="3735" actId="21"/>
+          <ac:graphicFrameMkLst>
+            <pc:docMk/>
+            <pc:sldMk cId="16987582" sldId="257"/>
+            <ac:graphicFrameMk id="2" creationId="{50697821-56EE-B522-2650-CAC52B000E80}"/>
+          </ac:graphicFrameMkLst>
+        </pc:graphicFrameChg>
+        <pc:graphicFrameChg chg="mod modGraphic">
+          <ac:chgData name="Venkata Penmetsa" userId="fb136f3b-4b0a-4b9a-88c4-9108679710cc" providerId="ADAL" clId="{5D1D206D-8F09-5220-B39A-2253563CE29E}" dt="2025-12-04T22:37:15.934" v="3733" actId="14100"/>
           <ac:graphicFrameMkLst>
             <pc:docMk/>
             <pc:sldMk cId="16987582" sldId="257"/>
@@ -170,17 +228,498 @@
           </ac:graphicFrameMkLst>
         </pc:graphicFrameChg>
         <pc:graphicFrameChg chg="mod modGraphic">
-          <ac:chgData name="Venkata Penmetsa" userId="fb136f3b-4b0a-4b9a-88c4-9108679710cc" providerId="ADAL" clId="{5D1D206D-8F09-5220-B39A-2253563CE29E}" dt="2025-12-02T16:59:38.992" v="754" actId="14734"/>
+          <ac:chgData name="Venkata Penmetsa" userId="fb136f3b-4b0a-4b9a-88c4-9108679710cc" providerId="ADAL" clId="{5D1D206D-8F09-5220-B39A-2253563CE29E}" dt="2025-12-04T16:48:11.705" v="1275" actId="2165"/>
           <ac:graphicFrameMkLst>
             <pc:docMk/>
             <pc:sldMk cId="16987582" sldId="257"/>
             <ac:graphicFrameMk id="19" creationId="{F586504E-E0C4-AFDD-B446-9114711C7538}"/>
           </ac:graphicFrameMkLst>
         </pc:graphicFrameChg>
+        <pc:picChg chg="add del mod">
+          <ac:chgData name="Venkata Penmetsa" userId="fb136f3b-4b0a-4b9a-88c4-9108679710cc" providerId="ADAL" clId="{5D1D206D-8F09-5220-B39A-2253563CE29E}" dt="2025-12-04T17:15:20.325" v="2643" actId="478"/>
+          <ac:picMkLst>
+            <pc:docMk/>
+            <pc:sldMk cId="16987582" sldId="257"/>
+            <ac:picMk id="24" creationId="{9FD8B250-F4D6-8580-45F0-B351E63B30B3}"/>
+          </ac:picMkLst>
+        </pc:picChg>
+        <pc:picChg chg="add mod">
+          <ac:chgData name="Venkata Penmetsa" userId="fb136f3b-4b0a-4b9a-88c4-9108679710cc" providerId="ADAL" clId="{5D1D206D-8F09-5220-B39A-2253563CE29E}" dt="2025-12-04T17:27:33.521" v="2670" actId="1076"/>
+          <ac:picMkLst>
+            <pc:docMk/>
+            <pc:sldMk cId="16987582" sldId="257"/>
+            <ac:picMk id="25" creationId="{43405D93-607C-0148-A3D5-AC6B7C7C1624}"/>
+          </ac:picMkLst>
+        </pc:picChg>
+        <pc:picChg chg="add mod">
+          <ac:chgData name="Venkata Penmetsa" userId="fb136f3b-4b0a-4b9a-88c4-9108679710cc" providerId="ADAL" clId="{5D1D206D-8F09-5220-B39A-2253563CE29E}" dt="2025-12-04T17:27:25.955" v="2668" actId="1076"/>
+          <ac:picMkLst>
+            <pc:docMk/>
+            <pc:sldMk cId="16987582" sldId="257"/>
+            <ac:picMk id="26" creationId="{9AC0C565-3A47-0652-68D9-F9E0C11AAC82}"/>
+          </ac:picMkLst>
+        </pc:picChg>
+        <pc:picChg chg="add mod">
+          <ac:chgData name="Venkata Penmetsa" userId="fb136f3b-4b0a-4b9a-88c4-9108679710cc" providerId="ADAL" clId="{5D1D206D-8F09-5220-B39A-2253563CE29E}" dt="2025-12-04T23:42:19.460" v="4441" actId="1076"/>
+          <ac:picMkLst>
+            <pc:docMk/>
+            <pc:sldMk cId="16987582" sldId="257"/>
+            <ac:picMk id="27" creationId="{8F87CD58-E062-CDF4-F810-D0A5DF2329AC}"/>
+          </ac:picMkLst>
+        </pc:picChg>
+      </pc:sldChg>
+      <pc:sldChg chg="modSp mod">
+        <pc:chgData name="Venkata Penmetsa" userId="fb136f3b-4b0a-4b9a-88c4-9108679710cc" providerId="ADAL" clId="{5D1D206D-8F09-5220-B39A-2253563CE29E}" dt="2025-12-04T15:53:32.315" v="880" actId="255"/>
+        <pc:sldMkLst>
+          <pc:docMk/>
+          <pc:sldMk cId="3786605963" sldId="258"/>
+        </pc:sldMkLst>
+        <pc:spChg chg="mod">
+          <ac:chgData name="Venkata Penmetsa" userId="fb136f3b-4b0a-4b9a-88c4-9108679710cc" providerId="ADAL" clId="{5D1D206D-8F09-5220-B39A-2253563CE29E}" dt="2025-12-04T15:53:32.315" v="880" actId="255"/>
+          <ac:spMkLst>
+            <pc:docMk/>
+            <pc:sldMk cId="3786605963" sldId="258"/>
+            <ac:spMk id="3" creationId="{F739399C-279E-3BBD-A288-50D8651352AC}"/>
+          </ac:spMkLst>
+        </pc:spChg>
       </pc:sldChg>
     </pc:docChg>
   </pc:docChgLst>
 </pc:chgInfo>
+</file>
+
+<file path=ppt/notesMasters/notesMaster1.xml><?xml version="1.0" encoding="utf-8"?>
+<p:notesMaster xmlns:a="http://schemas.openxmlformats.org/drawingml/2006/main" xmlns:r="http://schemas.openxmlformats.org/officeDocument/2006/relationships" xmlns:p="http://schemas.openxmlformats.org/presentationml/2006/main">
+  <p:cSld>
+    <p:bg>
+      <p:bgRef idx="1001">
+        <a:schemeClr val="bg1"/>
+      </p:bgRef>
+    </p:bg>
+    <p:spTree>
+      <p:nvGrpSpPr>
+        <p:cNvPr id="1" name=""/>
+        <p:cNvGrpSpPr/>
+        <p:nvPr/>
+      </p:nvGrpSpPr>
+      <p:grpSpPr>
+        <a:xfrm>
+          <a:off x="0" y="0"/>
+          <a:ext cx="0" cy="0"/>
+          <a:chOff x="0" y="0"/>
+          <a:chExt cx="0" cy="0"/>
+        </a:xfrm>
+      </p:grpSpPr>
+      <p:sp>
+        <p:nvSpPr>
+          <p:cNvPr id="2" name="Header Placeholder 1"/>
+          <p:cNvSpPr>
+            <a:spLocks noGrp="1"/>
+          </p:cNvSpPr>
+          <p:nvPr>
+            <p:ph type="hdr" sz="quarter"/>
+          </p:nvPr>
+        </p:nvSpPr>
+        <p:spPr>
+          <a:xfrm>
+            <a:off x="0" y="0"/>
+            <a:ext cx="2971800" cy="458788"/>
+          </a:xfrm>
+          <a:prstGeom prst="rect">
+            <a:avLst/>
+          </a:prstGeom>
+        </p:spPr>
+        <p:txBody>
+          <a:bodyPr vert="horz" lIns="91440" tIns="45720" rIns="91440" bIns="45720" rtlCol="0"/>
+          <a:lstStyle>
+            <a:lvl1pPr algn="l">
+              <a:defRPr sz="1200"/>
+            </a:lvl1pPr>
+          </a:lstStyle>
+          <a:p>
+            <a:endParaRPr lang="en-US"/>
+          </a:p>
+        </p:txBody>
+      </p:sp>
+      <p:sp>
+        <p:nvSpPr>
+          <p:cNvPr id="3" name="Date Placeholder 2"/>
+          <p:cNvSpPr>
+            <a:spLocks noGrp="1"/>
+          </p:cNvSpPr>
+          <p:nvPr>
+            <p:ph type="dt" idx="1"/>
+          </p:nvPr>
+        </p:nvSpPr>
+        <p:spPr>
+          <a:xfrm>
+            <a:off x="3884613" y="0"/>
+            <a:ext cx="2971800" cy="458788"/>
+          </a:xfrm>
+          <a:prstGeom prst="rect">
+            <a:avLst/>
+          </a:prstGeom>
+        </p:spPr>
+        <p:txBody>
+          <a:bodyPr vert="horz" lIns="91440" tIns="45720" rIns="91440" bIns="45720" rtlCol="0"/>
+          <a:lstStyle>
+            <a:lvl1pPr algn="r">
+              <a:defRPr sz="1200"/>
+            </a:lvl1pPr>
+          </a:lstStyle>
+          <a:p>
+            <a:fld id="{487747F6-1B26-9547-B8EC-8BB2D7E20793}" type="datetimeFigureOut">
+              <a:rPr lang="en-US" smtClean="0"/>
+              <a:t>12/4/25</a:t>
+            </a:fld>
+            <a:endParaRPr lang="en-US"/>
+          </a:p>
+        </p:txBody>
+      </p:sp>
+      <p:sp>
+        <p:nvSpPr>
+          <p:cNvPr id="4" name="Slide Image Placeholder 3"/>
+          <p:cNvSpPr>
+            <a:spLocks noGrp="1" noRot="1" noChangeAspect="1"/>
+          </p:cNvSpPr>
+          <p:nvPr>
+            <p:ph type="sldImg" idx="2"/>
+          </p:nvPr>
+        </p:nvSpPr>
+        <p:spPr>
+          <a:xfrm>
+            <a:off x="2271713" y="1143000"/>
+            <a:ext cx="2314575" cy="3086100"/>
+          </a:xfrm>
+          <a:prstGeom prst="rect">
+            <a:avLst/>
+          </a:prstGeom>
+          <a:noFill/>
+          <a:ln w="12700">
+            <a:solidFill>
+              <a:prstClr val="black"/>
+            </a:solidFill>
+          </a:ln>
+        </p:spPr>
+        <p:txBody>
+          <a:bodyPr vert="horz" lIns="91440" tIns="45720" rIns="91440" bIns="45720" rtlCol="0" anchor="ctr"/>
+          <a:lstStyle/>
+          <a:p>
+            <a:endParaRPr lang="en-US"/>
+          </a:p>
+        </p:txBody>
+      </p:sp>
+      <p:sp>
+        <p:nvSpPr>
+          <p:cNvPr id="5" name="Notes Placeholder 4"/>
+          <p:cNvSpPr>
+            <a:spLocks noGrp="1"/>
+          </p:cNvSpPr>
+          <p:nvPr>
+            <p:ph type="body" sz="quarter" idx="3"/>
+          </p:nvPr>
+        </p:nvSpPr>
+        <p:spPr>
+          <a:xfrm>
+            <a:off x="685800" y="4400550"/>
+            <a:ext cx="5486400" cy="3600450"/>
+          </a:xfrm>
+          <a:prstGeom prst="rect">
+            <a:avLst/>
+          </a:prstGeom>
+        </p:spPr>
+        <p:txBody>
+          <a:bodyPr vert="horz" lIns="91440" tIns="45720" rIns="91440" bIns="45720" rtlCol="0"/>
+          <a:lstStyle/>
+          <a:p>
+            <a:pPr lvl="0"/>
+            <a:r>
+              <a:rPr lang="en-GB"/>
+              <a:t>Click to edit Master text styles</a:t>
+            </a:r>
+          </a:p>
+          <a:p>
+            <a:pPr lvl="1"/>
+            <a:r>
+              <a:rPr lang="en-GB"/>
+              <a:t>Second level</a:t>
+            </a:r>
+          </a:p>
+          <a:p>
+            <a:pPr lvl="2"/>
+            <a:r>
+              <a:rPr lang="en-GB"/>
+              <a:t>Third level</a:t>
+            </a:r>
+          </a:p>
+          <a:p>
+            <a:pPr lvl="3"/>
+            <a:r>
+              <a:rPr lang="en-GB"/>
+              <a:t>Fourth level</a:t>
+            </a:r>
+          </a:p>
+          <a:p>
+            <a:pPr lvl="4"/>
+            <a:r>
+              <a:rPr lang="en-GB"/>
+              <a:t>Fifth level</a:t>
+            </a:r>
+            <a:endParaRPr lang="en-US"/>
+          </a:p>
+        </p:txBody>
+      </p:sp>
+      <p:sp>
+        <p:nvSpPr>
+          <p:cNvPr id="6" name="Footer Placeholder 5"/>
+          <p:cNvSpPr>
+            <a:spLocks noGrp="1"/>
+          </p:cNvSpPr>
+          <p:nvPr>
+            <p:ph type="ftr" sz="quarter" idx="4"/>
+          </p:nvPr>
+        </p:nvSpPr>
+        <p:spPr>
+          <a:xfrm>
+            <a:off x="0" y="8685213"/>
+            <a:ext cx="2971800" cy="458787"/>
+          </a:xfrm>
+          <a:prstGeom prst="rect">
+            <a:avLst/>
+          </a:prstGeom>
+        </p:spPr>
+        <p:txBody>
+          <a:bodyPr vert="horz" lIns="91440" tIns="45720" rIns="91440" bIns="45720" rtlCol="0" anchor="b"/>
+          <a:lstStyle>
+            <a:lvl1pPr algn="l">
+              <a:defRPr sz="1200"/>
+            </a:lvl1pPr>
+          </a:lstStyle>
+          <a:p>
+            <a:endParaRPr lang="en-US"/>
+          </a:p>
+        </p:txBody>
+      </p:sp>
+      <p:sp>
+        <p:nvSpPr>
+          <p:cNvPr id="7" name="Slide Number Placeholder 6"/>
+          <p:cNvSpPr>
+            <a:spLocks noGrp="1"/>
+          </p:cNvSpPr>
+          <p:nvPr>
+            <p:ph type="sldNum" sz="quarter" idx="5"/>
+          </p:nvPr>
+        </p:nvSpPr>
+        <p:spPr>
+          <a:xfrm>
+            <a:off x="3884613" y="8685213"/>
+            <a:ext cx="2971800" cy="458787"/>
+          </a:xfrm>
+          <a:prstGeom prst="rect">
+            <a:avLst/>
+          </a:prstGeom>
+        </p:spPr>
+        <p:txBody>
+          <a:bodyPr vert="horz" lIns="91440" tIns="45720" rIns="91440" bIns="45720" rtlCol="0" anchor="b"/>
+          <a:lstStyle>
+            <a:lvl1pPr algn="r">
+              <a:defRPr sz="1200"/>
+            </a:lvl1pPr>
+          </a:lstStyle>
+          <a:p>
+            <a:fld id="{7510C504-4D3F-C746-9A78-38FA614C4183}" type="slidenum">
+              <a:rPr lang="en-US" smtClean="0"/>
+              <a:t>‹#›</a:t>
+            </a:fld>
+            <a:endParaRPr lang="en-US"/>
+          </a:p>
+        </p:txBody>
+      </p:sp>
+    </p:spTree>
+    <p:extLst>
+      <p:ext uri="{BB962C8B-B14F-4D97-AF65-F5344CB8AC3E}">
+        <p14:creationId xmlns:p14="http://schemas.microsoft.com/office/powerpoint/2010/main" val="2617351294"/>
+      </p:ext>
+    </p:extLst>
+  </p:cSld>
+  <p:clrMap bg1="lt1" tx1="dk1" bg2="lt2" tx2="dk2" accent1="accent1" accent2="accent2" accent3="accent3" accent4="accent4" accent5="accent5" accent6="accent6" hlink="hlink" folHlink="folHlink"/>
+  <p:notesStyle>
+    <a:lvl1pPr marL="0" algn="l" defTabSz="914400" rtl="0" eaLnBrk="1" latinLnBrk="0" hangingPunct="1">
+      <a:defRPr sz="1200" kern="1200">
+        <a:solidFill>
+          <a:schemeClr val="tx1"/>
+        </a:solidFill>
+        <a:latin typeface="+mn-lt"/>
+        <a:ea typeface="+mn-ea"/>
+        <a:cs typeface="+mn-cs"/>
+      </a:defRPr>
+    </a:lvl1pPr>
+    <a:lvl2pPr marL="457200" algn="l" defTabSz="914400" rtl="0" eaLnBrk="1" latinLnBrk="0" hangingPunct="1">
+      <a:defRPr sz="1200" kern="1200">
+        <a:solidFill>
+          <a:schemeClr val="tx1"/>
+        </a:solidFill>
+        <a:latin typeface="+mn-lt"/>
+        <a:ea typeface="+mn-ea"/>
+        <a:cs typeface="+mn-cs"/>
+      </a:defRPr>
+    </a:lvl2pPr>
+    <a:lvl3pPr marL="914400" algn="l" defTabSz="914400" rtl="0" eaLnBrk="1" latinLnBrk="0" hangingPunct="1">
+      <a:defRPr sz="1200" kern="1200">
+        <a:solidFill>
+          <a:schemeClr val="tx1"/>
+        </a:solidFill>
+        <a:latin typeface="+mn-lt"/>
+        <a:ea typeface="+mn-ea"/>
+        <a:cs typeface="+mn-cs"/>
+      </a:defRPr>
+    </a:lvl3pPr>
+    <a:lvl4pPr marL="1371600" algn="l" defTabSz="914400" rtl="0" eaLnBrk="1" latinLnBrk="0" hangingPunct="1">
+      <a:defRPr sz="1200" kern="1200">
+        <a:solidFill>
+          <a:schemeClr val="tx1"/>
+        </a:solidFill>
+        <a:latin typeface="+mn-lt"/>
+        <a:ea typeface="+mn-ea"/>
+        <a:cs typeface="+mn-cs"/>
+      </a:defRPr>
+    </a:lvl4pPr>
+    <a:lvl5pPr marL="1828800" algn="l" defTabSz="914400" rtl="0" eaLnBrk="1" latinLnBrk="0" hangingPunct="1">
+      <a:defRPr sz="1200" kern="1200">
+        <a:solidFill>
+          <a:schemeClr val="tx1"/>
+        </a:solidFill>
+        <a:latin typeface="+mn-lt"/>
+        <a:ea typeface="+mn-ea"/>
+        <a:cs typeface="+mn-cs"/>
+      </a:defRPr>
+    </a:lvl5pPr>
+    <a:lvl6pPr marL="2286000" algn="l" defTabSz="914400" rtl="0" eaLnBrk="1" latinLnBrk="0" hangingPunct="1">
+      <a:defRPr sz="1200" kern="1200">
+        <a:solidFill>
+          <a:schemeClr val="tx1"/>
+        </a:solidFill>
+        <a:latin typeface="+mn-lt"/>
+        <a:ea typeface="+mn-ea"/>
+        <a:cs typeface="+mn-cs"/>
+      </a:defRPr>
+    </a:lvl6pPr>
+    <a:lvl7pPr marL="2743200" algn="l" defTabSz="914400" rtl="0" eaLnBrk="1" latinLnBrk="0" hangingPunct="1">
+      <a:defRPr sz="1200" kern="1200">
+        <a:solidFill>
+          <a:schemeClr val="tx1"/>
+        </a:solidFill>
+        <a:latin typeface="+mn-lt"/>
+        <a:ea typeface="+mn-ea"/>
+        <a:cs typeface="+mn-cs"/>
+      </a:defRPr>
+    </a:lvl7pPr>
+    <a:lvl8pPr marL="3200400" algn="l" defTabSz="914400" rtl="0" eaLnBrk="1" latinLnBrk="0" hangingPunct="1">
+      <a:defRPr sz="1200" kern="1200">
+        <a:solidFill>
+          <a:schemeClr val="tx1"/>
+        </a:solidFill>
+        <a:latin typeface="+mn-lt"/>
+        <a:ea typeface="+mn-ea"/>
+        <a:cs typeface="+mn-cs"/>
+      </a:defRPr>
+    </a:lvl8pPr>
+    <a:lvl9pPr marL="3657600" algn="l" defTabSz="914400" rtl="0" eaLnBrk="1" latinLnBrk="0" hangingPunct="1">
+      <a:defRPr sz="1200" kern="1200">
+        <a:solidFill>
+          <a:schemeClr val="tx1"/>
+        </a:solidFill>
+        <a:latin typeface="+mn-lt"/>
+        <a:ea typeface="+mn-ea"/>
+        <a:cs typeface="+mn-cs"/>
+      </a:defRPr>
+    </a:lvl9pPr>
+  </p:notesStyle>
+</p:notesMaster>
+</file>
+
+<file path=ppt/notesSlides/notesSlide1.xml><?xml version="1.0" encoding="utf-8"?>
+<p:notes xmlns:a="http://schemas.openxmlformats.org/drawingml/2006/main" xmlns:r="http://schemas.openxmlformats.org/officeDocument/2006/relationships" xmlns:p="http://schemas.openxmlformats.org/presentationml/2006/main">
+  <p:cSld>
+    <p:spTree>
+      <p:nvGrpSpPr>
+        <p:cNvPr id="1" name=""/>
+        <p:cNvGrpSpPr/>
+        <p:nvPr/>
+      </p:nvGrpSpPr>
+      <p:grpSpPr>
+        <a:xfrm>
+          <a:off x="0" y="0"/>
+          <a:ext cx="0" cy="0"/>
+          <a:chOff x="0" y="0"/>
+          <a:chExt cx="0" cy="0"/>
+        </a:xfrm>
+      </p:grpSpPr>
+      <p:sp>
+        <p:nvSpPr>
+          <p:cNvPr id="2" name="Slide Image Placeholder 1"/>
+          <p:cNvSpPr>
+            <a:spLocks noGrp="1" noRot="1" noChangeAspect="1"/>
+          </p:cNvSpPr>
+          <p:nvPr>
+            <p:ph type="sldImg"/>
+          </p:nvPr>
+        </p:nvSpPr>
+        <p:spPr/>
+      </p:sp>
+      <p:sp>
+        <p:nvSpPr>
+          <p:cNvPr id="3" name="Notes Placeholder 2"/>
+          <p:cNvSpPr>
+            <a:spLocks noGrp="1"/>
+          </p:cNvSpPr>
+          <p:nvPr>
+            <p:ph type="body" idx="1"/>
+          </p:nvPr>
+        </p:nvSpPr>
+        <p:spPr/>
+        <p:txBody>
+          <a:bodyPr/>
+          <a:lstStyle/>
+          <a:p>
+            <a:endParaRPr lang="en-US" dirty="0"/>
+          </a:p>
+        </p:txBody>
+      </p:sp>
+      <p:sp>
+        <p:nvSpPr>
+          <p:cNvPr id="4" name="Slide Number Placeholder 3"/>
+          <p:cNvSpPr>
+            <a:spLocks noGrp="1"/>
+          </p:cNvSpPr>
+          <p:nvPr>
+            <p:ph type="sldNum" sz="quarter" idx="5"/>
+          </p:nvPr>
+        </p:nvSpPr>
+        <p:spPr/>
+        <p:txBody>
+          <a:bodyPr/>
+          <a:lstStyle/>
+          <a:p>
+            <a:fld id="{7510C504-4D3F-C746-9A78-38FA614C4183}" type="slidenum">
+              <a:rPr lang="en-US" smtClean="0"/>
+              <a:t>2</a:t>
+            </a:fld>
+            <a:endParaRPr lang="en-US"/>
+          </a:p>
+        </p:txBody>
+      </p:sp>
+    </p:spTree>
+    <p:extLst>
+      <p:ext uri="{BB962C8B-B14F-4D97-AF65-F5344CB8AC3E}">
+        <p14:creationId xmlns:p14="http://schemas.microsoft.com/office/powerpoint/2010/main" val="795828160"/>
+      </p:ext>
+    </p:extLst>
+  </p:cSld>
+  <p:clrMapOvr>
+    <a:masterClrMapping/>
+  </p:clrMapOvr>
+</p:notes>
 </file>
 
 <file path=ppt/slideLayouts/slideLayout1.xml><?xml version="1.0" encoding="utf-8"?>
@@ -3433,14 +3972,14 @@
           <p:nvPr>
             <p:extLst>
               <p:ext uri="{D42A27DB-BD31-4B8C-83A1-F6EECF244321}">
-                <p14:modId xmlns:p14="http://schemas.microsoft.com/office/powerpoint/2010/main" val="464972760"/>
+                <p14:modId xmlns:p14="http://schemas.microsoft.com/office/powerpoint/2010/main" val="197693733"/>
               </p:ext>
             </p:extLst>
           </p:nvPr>
         </p:nvGraphicFramePr>
         <p:xfrm>
           <a:off x="105508" y="2251279"/>
-          <a:ext cx="9311542" cy="10370819"/>
+          <a:ext cx="9311542" cy="10462569"/>
         </p:xfrm>
         <a:graphic>
           <a:graphicData uri="http://schemas.openxmlformats.org/drawingml/2006/table">
@@ -3564,6 +4103,24 @@
                         <a:rPr lang="en-GB" sz="1050" dirty="0"/>
                         <a:t>Show two histograms here. One should show the distribution of one variable before it has been cleaned. The other should show the distribution of the same variable after cleaning. Choose a variable that needs to be cleaned!!</a:t>
                       </a:r>
+                    </a:p>
+                    <a:p>
+                      <a:pPr marL="0" indent="0">
+                        <a:buNone/>
+                      </a:pPr>
+                      <a:endParaRPr lang="en-GB" sz="1200" dirty="0"/>
+                    </a:p>
+                    <a:p>
+                      <a:pPr marL="0" indent="0">
+                        <a:buNone/>
+                      </a:pPr>
+                      <a:endParaRPr lang="en-GB" sz="1200" dirty="0"/>
+                    </a:p>
+                    <a:p>
+                      <a:pPr marL="0" indent="0">
+                        <a:buNone/>
+                      </a:pPr>
+                      <a:endParaRPr lang="en-GB" sz="1200" dirty="0"/>
                     </a:p>
                     <a:p>
                       <a:pPr marL="0" indent="0">
@@ -5305,7 +5862,7 @@
         <p:spPr>
           <a:xfrm>
             <a:off x="4538982" y="784321"/>
-            <a:ext cx="4767909" cy="3539430"/>
+            <a:ext cx="4767909" cy="4278094"/>
           </a:xfrm>
           <a:prstGeom prst="rect">
             <a:avLst/>
@@ -5427,6 +5984,22 @@
             </a:endParaRPr>
           </a:p>
           <a:p>
+            <a:endParaRPr lang="en-GB" sz="1200" dirty="0">
+              <a:solidFill>
+                <a:prstClr val="black"/>
+              </a:solidFill>
+              <a:latin typeface="Calibri" panose="020F0502020204030204"/>
+            </a:endParaRPr>
+          </a:p>
+          <a:p>
+            <a:endParaRPr lang="en-GB" sz="1200" dirty="0">
+              <a:solidFill>
+                <a:prstClr val="black"/>
+              </a:solidFill>
+              <a:latin typeface="Calibri" panose="020F0502020204030204"/>
+            </a:endParaRPr>
+          </a:p>
+          <a:p>
             <a:r>
               <a:rPr lang="en-GB" sz="1200" dirty="0">
                 <a:solidFill>
@@ -5434,34 +6007,8 @@
                 </a:solidFill>
                 <a:latin typeface="Calibri" panose="020F0502020204030204"/>
               </a:rPr>
-              <a:t>All the environmental measurements are treated as continuous numerical variables. The month attribute was treated as nominal categorical variable and the target area is treated as binary categorical variable. Only variables which would help us predicting the fire spread have been used. The rain </a:t>
-            </a:r>
-            <a:r>
-              <a:rPr lang="en-GB" sz="1200" dirty="0" err="1">
-                <a:solidFill>
-                  <a:prstClr val="black"/>
-                </a:solidFill>
-                <a:latin typeface="Calibri" panose="020F0502020204030204"/>
-              </a:rPr>
-              <a:t>varable</a:t>
-            </a:r>
-            <a:r>
-              <a:rPr lang="en-GB" sz="1200" dirty="0">
-                <a:solidFill>
-                  <a:prstClr val="black"/>
-                </a:solidFill>
-                <a:latin typeface="Calibri" panose="020F0502020204030204"/>
-              </a:rPr>
-              <a:t> is removed as most of the values are zero </a:t>
-            </a:r>
-          </a:p>
-          <a:p>
-            <a:endParaRPr lang="en-GB" sz="1200" dirty="0">
-              <a:solidFill>
-                <a:prstClr val="black"/>
-              </a:solidFill>
-              <a:latin typeface="Calibri" panose="020F0502020204030204"/>
-            </a:endParaRPr>
+              <a:t>All the environmental variables are treated as continuous numeric variables. The month variable is treated as nominal categorical. The target area variable is treated as binary categorical which shows whether the burned area exceeds 4%. The X, Y variables are not used as they don’t really add a lot of information in the dataset. Most of the rain values are zero which is why it has been removed. The day variable don’t necessarily help the model as we don’t want to see weekly patterns which is why It has been removed as well. </a:t>
+            </a:r>
           </a:p>
         </p:txBody>
       </p:sp>
@@ -5479,8 +6026,8 @@
         </p:nvSpPr>
         <p:spPr>
           <a:xfrm>
-            <a:off x="523856" y="6208027"/>
-            <a:ext cx="8848120" cy="2185214"/>
+            <a:off x="475353" y="6121626"/>
+            <a:ext cx="8848120" cy="1877437"/>
           </a:xfrm>
           <a:prstGeom prst="rect">
             <a:avLst/>
@@ -5536,56 +6083,6 @@
               <a:t>5. Model Training and Hyper Parameters</a:t>
             </a:r>
             <a:endParaRPr lang="en-GB" sz="2000" b="0" i="0" u="none" strike="noStrike" kern="1200" cap="none" spc="0" normalizeH="0" baseline="0" noProof="0" dirty="0">
-              <a:ln>
-                <a:noFill/>
-              </a:ln>
-              <a:solidFill>
-                <a:prstClr val="black"/>
-              </a:solidFill>
-              <a:effectLst/>
-              <a:uLnTx/>
-              <a:uFillTx/>
-              <a:latin typeface="Calibri" panose="020F0502020204030204"/>
-              <a:ea typeface="Calibri"/>
-              <a:cs typeface="Calibri"/>
-            </a:endParaRPr>
-          </a:p>
-          <a:p>
-            <a:pPr marL="0" marR="0" lvl="0" indent="0" algn="l" defTabSz="1706910" rtl="0" eaLnBrk="1" fontAlgn="auto" latinLnBrk="0" hangingPunct="1">
-              <a:lnSpc>
-                <a:spcPct val="100000"/>
-              </a:lnSpc>
-              <a:spcBef>
-                <a:spcPts val="0"/>
-              </a:spcBef>
-              <a:spcAft>
-                <a:spcPts val="0"/>
-              </a:spcAft>
-              <a:buClrTx/>
-              <a:buSzTx/>
-              <a:buFontTx/>
-              <a:buNone/>
-              <a:tabLst/>
-              <a:defRPr/>
-            </a:pPr>
-            <a:r>
-              <a:rPr kumimoji="0" lang="en-US" sz="1000" b="0" i="0" u="none" strike="noStrike" kern="1200" cap="none" spc="0" normalizeH="0" baseline="0" noProof="0" dirty="0">
-                <a:ln>
-                  <a:noFill/>
-                </a:ln>
-                <a:solidFill>
-                  <a:prstClr val="black"/>
-                </a:solidFill>
-                <a:effectLst/>
-                <a:uLnTx/>
-                <a:uFillTx/>
-                <a:latin typeface="Calibri" panose="020F0502020204030204"/>
-                <a:ea typeface="+mn-ea"/>
-                <a:cs typeface="+mn-cs"/>
-              </a:rPr>
-              <a:t>A table showing the different models and hyper parameters you trained, along with the correct metric for each; Add a sentence on how you chose the hyper parameter values. Make sure you name the metric correctly.</a:t>
-            </a:r>
-            <a:endParaRPr lang="en-US" sz="1000" b="0" i="0" u="none" strike="noStrike" kern="1200" cap="none" spc="0" normalizeH="0" baseline="0" noProof="0" dirty="0">
               <a:ln>
                 <a:noFill/>
               </a:ln>
@@ -5848,8 +6345,8 @@
         </p:nvSpPr>
         <p:spPr>
           <a:xfrm>
-            <a:off x="475353" y="8816780"/>
-            <a:ext cx="8831538" cy="2015936"/>
+            <a:off x="483644" y="8223912"/>
+            <a:ext cx="8831538" cy="2062103"/>
           </a:xfrm>
           <a:prstGeom prst="rect">
             <a:avLst/>
@@ -5924,7 +6421,7 @@
               <a:defRPr/>
             </a:pPr>
             <a:r>
-              <a:rPr kumimoji="0" lang="en-GB" sz="1050" b="0" i="0" u="none" strike="noStrike" kern="1200" cap="none" spc="0" normalizeH="0" baseline="0" noProof="0" dirty="0">
+              <a:rPr kumimoji="0" lang="en-GB" sz="1200" b="0" i="0" u="none" strike="noStrike" kern="1200" cap="none" spc="0" normalizeH="0" baseline="0" noProof="0" dirty="0">
                 <a:ln>
                   <a:noFill/>
                 </a:ln>
@@ -5938,22 +6435,8 @@
                 <a:ea typeface="+mn-ea"/>
                 <a:cs typeface="+mn-cs"/>
               </a:rPr>
-              <a:t>Say how you chose the final model to test, and how you trained that model.</a:t>
-            </a:r>
-            <a:endParaRPr lang="en-GB" sz="1050" b="0" i="0" u="none" strike="noStrike" kern="1200" cap="none" spc="0" normalizeH="0" baseline="0" noProof="0" dirty="0">
-              <a:ln>
-                <a:noFill/>
-              </a:ln>
-              <a:solidFill>
-                <a:prstClr val="black"/>
-              </a:solidFill>
-              <a:effectLst/>
-              <a:uLnTx/>
-              <a:uFillTx/>
-              <a:latin typeface="Calibri" panose="020F0502020204030204"/>
-              <a:ea typeface="Calibri"/>
-              <a:cs typeface="Calibri"/>
-            </a:endParaRPr>
+              <a:t>The final model was evaluated on the 30% test using confusion matrix. It correctly </a:t>
+            </a:r>
           </a:p>
           <a:p>
             <a:pPr marL="0" marR="0" lvl="0" indent="0" algn="l" defTabSz="1706910" rtl="0" eaLnBrk="1" fontAlgn="auto" latinLnBrk="0" hangingPunct="1">
@@ -5974,7 +6457,7 @@
               <a:defRPr/>
             </a:pPr>
             <a:r>
-              <a:rPr kumimoji="0" lang="en-GB" sz="1050" b="0" i="0" u="none" strike="noStrike" kern="1200" cap="none" spc="0" normalizeH="0" baseline="0" noProof="0" dirty="0">
+              <a:rPr kumimoji="0" lang="en-GB" sz="1200" b="0" i="0" u="none" strike="noStrike" kern="1200" cap="none" spc="0" normalizeH="0" baseline="0" noProof="0" dirty="0">
                 <a:ln>
                   <a:noFill/>
                 </a:ln>
@@ -5988,22 +6471,34 @@
                 <a:ea typeface="+mn-ea"/>
                 <a:cs typeface="+mn-cs"/>
               </a:rPr>
-              <a:t>Put the confusion matrix here</a:t>
-            </a:r>
-            <a:endParaRPr lang="en-GB" sz="1050" b="0" i="0" u="none" strike="noStrike" kern="1200" cap="none" spc="0" normalizeH="0" baseline="0" noProof="0" dirty="0">
-              <a:ln>
-                <a:noFill/>
-              </a:ln>
-              <a:solidFill>
-                <a:prstClr val="black"/>
-              </a:solidFill>
-              <a:effectLst/>
-              <a:uLnTx/>
-              <a:uFillTx/>
-              <a:latin typeface="Calibri" panose="020F0502020204030204"/>
-              <a:ea typeface="Calibri"/>
-              <a:cs typeface="Calibri"/>
-            </a:endParaRPr>
+              <a:t>predicted : </a:t>
+            </a:r>
+            <a:r>
+              <a:rPr lang="en-GB" sz="1200" dirty="0">
+                <a:solidFill>
+                  <a:prstClr val="black"/>
+                </a:solidFill>
+                <a:latin typeface="Calibri" panose="020F0502020204030204"/>
+              </a:rPr>
+              <a:t>74 large fire cases (true positives) and 56 non-large</a:t>
+            </a:r>
+            <a:r>
+              <a:rPr kumimoji="0" lang="en-GB" sz="1200" b="0" i="0" u="none" strike="noStrike" kern="1200" cap="none" spc="0" normalizeH="0" baseline="0" noProof="0" dirty="0">
+                <a:ln>
+                  <a:noFill/>
+                </a:ln>
+                <a:solidFill>
+                  <a:prstClr val="black"/>
+                </a:solidFill>
+                <a:effectLst/>
+                <a:uLnTx/>
+                <a:uFillTx/>
+                <a:latin typeface="Calibri" panose="020F0502020204030204"/>
+                <a:ea typeface="+mn-ea"/>
+                <a:cs typeface="+mn-cs"/>
+              </a:rPr>
+              <a:t> fire cases (true negatives)</a:t>
+            </a:r>
           </a:p>
           <a:p>
             <a:pPr marL="0" marR="0" lvl="0" indent="0" algn="l" defTabSz="1706910" rtl="0" eaLnBrk="1" fontAlgn="auto" latinLnBrk="0" hangingPunct="1">
@@ -6023,20 +6518,32 @@
               <a:tabLst/>
               <a:defRPr/>
             </a:pPr>
-            <a:endParaRPr kumimoji="0" lang="en-GB" sz="1200" b="0" i="0" u="none" strike="noStrike" kern="1200" cap="none" spc="0" normalizeH="0" baseline="0" noProof="0" dirty="0">
-              <a:ln>
-                <a:noFill/>
-              </a:ln>
-              <a:solidFill>
-                <a:prstClr val="black"/>
-              </a:solidFill>
-              <a:effectLst/>
-              <a:uLnTx/>
-              <a:uFillTx/>
-              <a:latin typeface="Calibri" panose="020F0502020204030204"/>
-              <a:ea typeface="+mn-ea"/>
-              <a:cs typeface="+mn-cs"/>
-            </a:endParaRPr>
+            <a:r>
+              <a:rPr lang="en-GB" sz="1200" dirty="0">
+                <a:solidFill>
+                  <a:prstClr val="black"/>
+                </a:solidFill>
+                <a:latin typeface="Calibri" panose="020F0502020204030204"/>
+              </a:rPr>
+              <a:t>Which is around 88%</a:t>
+            </a:r>
+            <a:r>
+              <a:rPr kumimoji="0" lang="en-GB" sz="1200" b="0" i="0" u="none" strike="noStrike" kern="1200" cap="none" spc="0" normalizeH="0" baseline="0" noProof="0" dirty="0">
+                <a:ln>
+                  <a:noFill/>
+                </a:ln>
+                <a:solidFill>
+                  <a:prstClr val="black"/>
+                </a:solidFill>
+                <a:effectLst/>
+                <a:uLnTx/>
+                <a:uFillTx/>
+                <a:latin typeface="Calibri" panose="020F0502020204030204"/>
+                <a:ea typeface="+mn-ea"/>
+                <a:cs typeface="+mn-cs"/>
+              </a:rPr>
+              <a:t> correctly predicting the outcomes which matched with our F1 </a:t>
+            </a:r>
           </a:p>
           <a:p>
             <a:pPr marL="0" marR="0" lvl="0" indent="0" algn="l" defTabSz="1706910" rtl="0" eaLnBrk="1" fontAlgn="auto" latinLnBrk="0" hangingPunct="1">
@@ -6056,20 +6563,32 @@
               <a:tabLst/>
               <a:defRPr/>
             </a:pPr>
-            <a:endParaRPr kumimoji="0" lang="en-GB" sz="1200" b="0" i="0" u="none" strike="noStrike" kern="1200" cap="none" spc="0" normalizeH="0" baseline="0" noProof="0" dirty="0">
-              <a:ln>
-                <a:noFill/>
-              </a:ln>
-              <a:solidFill>
-                <a:prstClr val="black"/>
-              </a:solidFill>
-              <a:effectLst/>
-              <a:uLnTx/>
-              <a:uFillTx/>
-              <a:latin typeface="Calibri" panose="020F0502020204030204"/>
-              <a:ea typeface="+mn-ea"/>
-              <a:cs typeface="+mn-cs"/>
-            </a:endParaRPr>
+            <a:r>
+              <a:rPr kumimoji="0" lang="en-GB" sz="1200" b="0" i="0" u="none" strike="noStrike" kern="1200" cap="none" spc="0" normalizeH="0" baseline="0" noProof="0" dirty="0">
+                <a:ln>
+                  <a:noFill/>
+                </a:ln>
+                <a:solidFill>
+                  <a:prstClr val="black"/>
+                </a:solidFill>
+                <a:effectLst/>
+                <a:uLnTx/>
+                <a:uFillTx/>
+                <a:latin typeface="Calibri" panose="020F0502020204030204"/>
+                <a:ea typeface="+mn-ea"/>
+                <a:cs typeface="+mn-cs"/>
+              </a:rPr>
+              <a:t>validation metric. The model made 9 false positives </a:t>
+            </a:r>
+            <a:r>
+              <a:rPr lang="en-GB" sz="1200" dirty="0">
+                <a:solidFill>
+                  <a:prstClr val="black"/>
+                </a:solidFill>
+                <a:latin typeface="Calibri" panose="020F0502020204030204"/>
+              </a:rPr>
+              <a:t>(predicting a fire when there is none) </a:t>
+            </a:r>
           </a:p>
           <a:p>
             <a:pPr marL="0" marR="0" lvl="0" indent="0" algn="l" defTabSz="1706910" rtl="0" eaLnBrk="1" fontAlgn="auto" latinLnBrk="0" hangingPunct="1">
@@ -6089,7 +6608,33 @@
               <a:tabLst/>
               <a:defRPr/>
             </a:pPr>
-            <a:endParaRPr kumimoji="0" lang="en-GB" sz="1200" b="0" i="0" u="none" strike="noStrike" kern="1200" cap="none" spc="0" normalizeH="0" baseline="0" noProof="0" dirty="0">
+            <a:r>
+              <a:rPr lang="en-GB" sz="1200" dirty="0">
+                <a:solidFill>
+                  <a:prstClr val="black"/>
+                </a:solidFill>
+                <a:latin typeface="Calibri" panose="020F0502020204030204"/>
+              </a:rPr>
+              <a:t>and 9 false negatives (failed to predict a fire). </a:t>
+            </a:r>
+            <a:r>
+              <a:rPr kumimoji="0" lang="en-GB" sz="1200" b="0" i="0" u="none" strike="noStrike" kern="1200" cap="none" spc="0" normalizeH="0" baseline="0" noProof="0" dirty="0">
+                <a:ln>
+                  <a:noFill/>
+                </a:ln>
+                <a:solidFill>
+                  <a:prstClr val="black"/>
+                </a:solidFill>
+                <a:effectLst/>
+                <a:uLnTx/>
+                <a:uFillTx/>
+                <a:latin typeface="Calibri" panose="020F0502020204030204"/>
+                <a:ea typeface="+mn-ea"/>
+                <a:cs typeface="+mn-cs"/>
+              </a:rPr>
+              <a:t>                                        </a:t>
+            </a:r>
+            <a:endParaRPr lang="en-GB" sz="1200" b="0" i="0" u="none" strike="noStrike" kern="1200" cap="none" spc="0" normalizeH="0" baseline="0" noProof="0" dirty="0">
               <a:ln>
                 <a:noFill/>
               </a:ln>
@@ -6100,8 +6645,8 @@
               <a:uLnTx/>
               <a:uFillTx/>
               <a:latin typeface="Calibri" panose="020F0502020204030204"/>
-              <a:ea typeface="+mn-ea"/>
-              <a:cs typeface="+mn-cs"/>
+              <a:ea typeface="Calibri"/>
+              <a:cs typeface="Calibri"/>
             </a:endParaRPr>
           </a:p>
           <a:p>
@@ -6309,14 +6854,14 @@
           <p:nvPr>
             <p:extLst>
               <p:ext uri="{D42A27DB-BD31-4B8C-83A1-F6EECF244321}">
-                <p14:modId xmlns:p14="http://schemas.microsoft.com/office/powerpoint/2010/main" val="512623820"/>
+                <p14:modId xmlns:p14="http://schemas.microsoft.com/office/powerpoint/2010/main" val="4244609432"/>
               </p:ext>
             </p:extLst>
           </p:nvPr>
         </p:nvGraphicFramePr>
         <p:xfrm>
-          <a:off x="4863387" y="6716562"/>
-          <a:ext cx="4443504" cy="1737360"/>
+          <a:off x="4767435" y="5313198"/>
+          <a:ext cx="4358411" cy="2773680"/>
         </p:xfrm>
         <a:graphic>
           <a:graphicData uri="http://schemas.openxmlformats.org/drawingml/2006/table">
@@ -6325,21 +6870,21 @@
                 <a:tableStyleId>{5C22544A-7EE6-4342-B048-85BDC9FD1C3A}</a:tableStyleId>
               </a:tblPr>
               <a:tblGrid>
-                <a:gridCol w="1481168">
+                <a:gridCol w="1451737">
                   <a:extLst>
                     <a:ext uri="{9D8B030D-6E8A-4147-A177-3AD203B41FA5}">
                       <a16:colId xmlns:a16="http://schemas.microsoft.com/office/drawing/2014/main" val="1907166431"/>
                     </a:ext>
                   </a:extLst>
                 </a:gridCol>
-                <a:gridCol w="1865917">
+                <a:gridCol w="1904920">
                   <a:extLst>
                     <a:ext uri="{9D8B030D-6E8A-4147-A177-3AD203B41FA5}">
                       <a16:colId xmlns:a16="http://schemas.microsoft.com/office/drawing/2014/main" val="3484362391"/>
                     </a:ext>
                   </a:extLst>
                 </a:gridCol>
-                <a:gridCol w="1096419">
+                <a:gridCol w="1001754">
                   <a:extLst>
                     <a:ext uri="{9D8B030D-6E8A-4147-A177-3AD203B41FA5}">
                       <a16:colId xmlns:a16="http://schemas.microsoft.com/office/drawing/2014/main" val="326053815"/>
@@ -6347,14 +6892,14 @@
                   </a:extLst>
                 </a:gridCol>
               </a:tblGrid>
-              <a:tr h="561889">
+              <a:tr h="345539">
                 <a:tc>
                   <a:txBody>
                     <a:bodyPr/>
                     <a:lstStyle/>
                     <a:p>
                       <a:r>
-                        <a:rPr lang="en-GB" sz="1800" dirty="0"/>
+                        <a:rPr lang="en-GB" sz="1300" dirty="0"/>
                         <a:t>Model</a:t>
                       </a:r>
                     </a:p>
@@ -6367,7 +6912,7 @@
                     <a:lstStyle/>
                     <a:p>
                       <a:r>
-                        <a:rPr lang="en-GB" sz="1800" dirty="0"/>
+                        <a:rPr lang="en-GB" sz="1300" dirty="0"/>
                         <a:t>Hyper Parameters</a:t>
                       </a:r>
                     </a:p>
@@ -6380,8 +6925,8 @@
                     <a:lstStyle/>
                     <a:p>
                       <a:r>
-                        <a:rPr lang="en-GB" sz="1800" dirty="0"/>
-                        <a:t>Validation Metric</a:t>
+                        <a:rPr lang="en-GB" sz="1300" dirty="0"/>
+                        <a:t>Validation Metric (F1)</a:t>
                       </a:r>
                     </a:p>
                   </a:txBody>
@@ -6393,17 +6938,16 @@
                   </a:ext>
                 </a:extLst>
               </a:tr>
-              <a:tr h="268174">
+              <a:tr h="323943">
                 <a:tc>
                   <a:txBody>
                     <a:bodyPr/>
                     <a:lstStyle/>
                     <a:p>
                       <a:r>
-                        <a:rPr lang="en-US" sz="1200" dirty="0"/>
-                        <a:t>Model 1</a:t>
+                        <a:rPr lang="en-GB" sz="1200" dirty="0"/>
+                        <a:t>Logistic regression</a:t>
                       </a:r>
-                      <a:endParaRPr lang="en-GB" sz="1200" dirty="0"/>
                     </a:p>
                   </a:txBody>
                   <a:tcPr/>
@@ -6415,7 +6959,7 @@
                     <a:p>
                       <a:r>
                         <a:rPr lang="en-GB" sz="1200" dirty="0"/>
-                        <a:t>Hyper parameter list</a:t>
+                        <a:t>C = 1; Regularisation type = L2</a:t>
                       </a:r>
                     </a:p>
                   </a:txBody>
@@ -6428,7 +6972,7 @@
                     <a:p>
                       <a:r>
                         <a:rPr lang="en-GB" sz="1200" dirty="0"/>
-                        <a:t>A%</a:t>
+                        <a:t>63.2 %</a:t>
                       </a:r>
                     </a:p>
                   </a:txBody>
@@ -6440,7 +6984,7 @@
                   </a:ext>
                 </a:extLst>
               </a:tr>
-              <a:tr h="242633">
+              <a:tr h="323943">
                 <a:tc>
                   <a:txBody>
                     <a:bodyPr/>
@@ -6465,7 +7009,7 @@
                       </a:pPr>
                       <a:r>
                         <a:rPr lang="en-US" sz="1200" dirty="0"/>
-                        <a:t>Model 2</a:t>
+                        <a:t>Neural network</a:t>
                       </a:r>
                       <a:endParaRPr lang="en-GB" sz="1200" dirty="0"/>
                     </a:p>
@@ -6479,7 +7023,13 @@
                     <a:p>
                       <a:r>
                         <a:rPr lang="en-GB" sz="1200" dirty="0"/>
-                        <a:t>Hyper parameter list</a:t>
+                        <a:t>Hidden layers = 100;</a:t>
+                      </a:r>
+                    </a:p>
+                    <a:p>
+                      <a:r>
+                        <a:rPr lang="en-GB" sz="1200" dirty="0"/>
+                        <a:t>Max iterations = 200</a:t>
                       </a:r>
                     </a:p>
                   </a:txBody>
@@ -6492,7 +7042,7 @@
                     <a:p>
                       <a:r>
                         <a:rPr lang="en-GB" sz="1200" dirty="0"/>
-                        <a:t>B%</a:t>
+                        <a:t>79.6 %</a:t>
                       </a:r>
                     </a:p>
                   </a:txBody>
@@ -6504,7 +7054,7 @@
                   </a:ext>
                 </a:extLst>
               </a:tr>
-              <a:tr h="242633">
+              <a:tr h="323943">
                 <a:tc>
                   <a:txBody>
                     <a:bodyPr/>
@@ -6529,7 +7079,7 @@
                       </a:pPr>
                       <a:r>
                         <a:rPr lang="en-US" sz="1200" dirty="0"/>
-                        <a:t>Model 3</a:t>
+                        <a:t>Gradient boosting</a:t>
                       </a:r>
                       <a:endParaRPr lang="en-GB" sz="1200" dirty="0"/>
                     </a:p>
@@ -6543,7 +7093,7 @@
                     <a:p>
                       <a:r>
                         <a:rPr lang="en-GB" sz="1200" dirty="0"/>
-                        <a:t>Hyper parameter list</a:t>
+                        <a:t>No of trees = 75; learning rate = 0.1</a:t>
                       </a:r>
                     </a:p>
                   </a:txBody>
@@ -6556,7 +7106,7 @@
                     <a:p>
                       <a:r>
                         <a:rPr lang="en-GB" sz="1200" dirty="0"/>
-                        <a:t>C%</a:t>
+                        <a:t>87.8 %</a:t>
                       </a:r>
                     </a:p>
                   </a:txBody>
@@ -6568,7 +7118,7 @@
                   </a:ext>
                 </a:extLst>
               </a:tr>
-              <a:tr h="242633">
+              <a:tr h="194366">
                 <a:tc>
                   <a:txBody>
                     <a:bodyPr/>
@@ -6576,9 +7126,8 @@
                     <a:p>
                       <a:r>
                         <a:rPr lang="en-US" sz="1200" dirty="0"/>
-                        <a:t>Model 4 ….</a:t>
+                        <a:t>Random forest</a:t>
                       </a:r>
-                      <a:endParaRPr lang="en-GB" sz="1200" dirty="0"/>
                     </a:p>
                   </a:txBody>
                   <a:tcPr/>
@@ -6590,7 +7139,7 @@
                     <a:p>
                       <a:r>
                         <a:rPr lang="en-GB" sz="1200" dirty="0"/>
-                        <a:t>Hyper parameter list</a:t>
+                        <a:t>No of trees = 100</a:t>
                       </a:r>
                     </a:p>
                   </a:txBody>
@@ -6603,7 +7152,7 @@
                     <a:p>
                       <a:r>
                         <a:rPr lang="en-GB" sz="1200" dirty="0"/>
-                        <a:t>D%</a:t>
+                        <a:t>85.8 %</a:t>
                       </a:r>
                     </a:p>
                   </a:txBody>
@@ -6615,73 +7164,17 @@
                   </a:ext>
                 </a:extLst>
               </a:tr>
-            </a:tbl>
-          </a:graphicData>
-        </a:graphic>
-      </p:graphicFrame>
-      <p:graphicFrame>
-        <p:nvGraphicFramePr>
-          <p:cNvPr id="2" name="Table 2">
-            <a:extLst>
-              <a:ext uri="{FF2B5EF4-FFF2-40B4-BE49-F238E27FC236}">
-                <a16:creationId xmlns:a16="http://schemas.microsoft.com/office/drawing/2014/main" id="{50697821-56EE-B522-2650-CAC52B000E80}"/>
-              </a:ext>
-            </a:extLst>
-          </p:cNvPr>
-          <p:cNvGraphicFramePr>
-            <a:graphicFrameLocks noGrp="1"/>
-          </p:cNvGraphicFramePr>
-          <p:nvPr>
-            <p:extLst>
-              <p:ext uri="{D42A27DB-BD31-4B8C-83A1-F6EECF244321}">
-                <p14:modId xmlns:p14="http://schemas.microsoft.com/office/powerpoint/2010/main" val="1738814142"/>
-              </p:ext>
-            </p:extLst>
-          </p:nvPr>
-        </p:nvGraphicFramePr>
-        <p:xfrm>
-          <a:off x="589137" y="9555928"/>
-          <a:ext cx="4178298" cy="1120548"/>
-        </p:xfrm>
-        <a:graphic>
-          <a:graphicData uri="http://schemas.openxmlformats.org/drawingml/2006/table">
-            <a:tbl>
-              <a:tblPr firstRow="1" bandRow="1">
-                <a:tableStyleId>{5C22544A-7EE6-4342-B048-85BDC9FD1C3A}</a:tableStyleId>
-              </a:tblPr>
-              <a:tblGrid>
-                <a:gridCol w="1392766">
-                  <a:extLst>
-                    <a:ext uri="{9D8B030D-6E8A-4147-A177-3AD203B41FA5}">
-                      <a16:colId xmlns:a16="http://schemas.microsoft.com/office/drawing/2014/main" val="3385219870"/>
-                    </a:ext>
-                  </a:extLst>
-                </a:gridCol>
-                <a:gridCol w="1392766">
-                  <a:extLst>
-                    <a:ext uri="{9D8B030D-6E8A-4147-A177-3AD203B41FA5}">
-                      <a16:colId xmlns:a16="http://schemas.microsoft.com/office/drawing/2014/main" val="2134976436"/>
-                    </a:ext>
-                  </a:extLst>
-                </a:gridCol>
-                <a:gridCol w="1392766">
-                  <a:extLst>
-                    <a:ext uri="{9D8B030D-6E8A-4147-A177-3AD203B41FA5}">
-                      <a16:colId xmlns:a16="http://schemas.microsoft.com/office/drawing/2014/main" val="629384850"/>
-                    </a:ext>
-                  </a:extLst>
-                </a:gridCol>
-              </a:tblGrid>
-              <a:tr h="370840">
+              <a:tr h="453520">
                 <a:tc>
                   <a:txBody>
                     <a:bodyPr/>
                     <a:lstStyle/>
                     <a:p>
                       <a:r>
-                        <a:rPr lang="en-GB" sz="1200" dirty="0"/>
-                        <a:t>Actual / Predicted</a:t>
+                        <a:rPr lang="en-US" sz="1200" dirty="0" err="1"/>
+                        <a:t>kNN</a:t>
                       </a:r>
+                      <a:endParaRPr lang="en-US" sz="1200" dirty="0"/>
                     </a:p>
                   </a:txBody>
                   <a:tcPr/>
@@ -6693,7 +7186,19 @@
                     <a:p>
                       <a:r>
                         <a:rPr lang="en-GB" sz="1200" dirty="0"/>
-                        <a:t>Good</a:t>
+                        <a:t>No of neighbour=  10;</a:t>
+                      </a:r>
+                    </a:p>
+                    <a:p>
+                      <a:r>
+                        <a:rPr lang="en-GB" sz="1200" dirty="0"/>
+                        <a:t>Metric = Euclidean</a:t>
+                      </a:r>
+                    </a:p>
+                    <a:p>
+                      <a:r>
+                        <a:rPr lang="en-GB" sz="1200" dirty="0"/>
+                        <a:t>Weight =. uniform</a:t>
                       </a:r>
                     </a:p>
                   </a:txBody>
@@ -6706,7 +7211,7 @@
                     <a:p>
                       <a:r>
                         <a:rPr lang="en-GB" sz="1200" dirty="0"/>
-                        <a:t>Bad</a:t>
+                        <a:t>82.4 %</a:t>
                       </a:r>
                     </a:p>
                   </a:txBody>
@@ -6714,102 +7219,7 @@
                 </a:tc>
                 <a:extLst>
                   <a:ext uri="{0D108BD9-81ED-4DB2-BD59-A6C34878D82A}">
-                    <a16:rowId xmlns:a16="http://schemas.microsoft.com/office/drawing/2014/main" val="2126179801"/>
-                  </a:ext>
-                </a:extLst>
-              </a:tr>
-              <a:tr h="370840">
-                <a:tc>
-                  <a:txBody>
-                    <a:bodyPr/>
-                    <a:lstStyle/>
-                    <a:p>
-                      <a:r>
-                        <a:rPr lang="en-GB" sz="1200" dirty="0"/>
-                        <a:t>Good</a:t>
-                      </a:r>
-                    </a:p>
-                  </a:txBody>
-                  <a:tcPr/>
-                </a:tc>
-                <a:tc>
-                  <a:txBody>
-                    <a:bodyPr/>
-                    <a:lstStyle/>
-                    <a:p>
-                      <a:r>
-                        <a:rPr lang="en-GB" sz="1200" dirty="0"/>
-                        <a:t>X</a:t>
-                      </a:r>
-                    </a:p>
-                  </a:txBody>
-                  <a:tcPr/>
-                </a:tc>
-                <a:tc>
-                  <a:txBody>
-                    <a:bodyPr/>
-                    <a:lstStyle/>
-                    <a:p>
-                      <a:r>
-                        <a:rPr lang="en-US" sz="1200" dirty="0"/>
-                        <a:t>X</a:t>
-                      </a:r>
-                      <a:endParaRPr lang="en-GB" sz="1200" dirty="0"/>
-                    </a:p>
-                  </a:txBody>
-                  <a:tcPr/>
-                </a:tc>
-                <a:extLst>
-                  <a:ext uri="{0D108BD9-81ED-4DB2-BD59-A6C34878D82A}">
-                    <a16:rowId xmlns:a16="http://schemas.microsoft.com/office/drawing/2014/main" val="1186692526"/>
-                  </a:ext>
-                </a:extLst>
-              </a:tr>
-              <a:tr h="378868">
-                <a:tc>
-                  <a:txBody>
-                    <a:bodyPr/>
-                    <a:lstStyle/>
-                    <a:p>
-                      <a:r>
-                        <a:rPr lang="en-GB" sz="1200" dirty="0"/>
-                        <a:t>Bad</a:t>
-                      </a:r>
-                    </a:p>
-                  </a:txBody>
-                  <a:tcPr/>
-                </a:tc>
-                <a:tc>
-                  <a:txBody>
-                    <a:bodyPr/>
-                    <a:lstStyle/>
-                    <a:p>
-                      <a:r>
-                        <a:rPr lang="en-US" sz="1200" dirty="0"/>
-                        <a:t>X</a:t>
-                      </a:r>
-                      <a:endParaRPr lang="en-GB" sz="1200" dirty="0"/>
-                    </a:p>
-                  </a:txBody>
-                  <a:tcPr/>
-                </a:tc>
-                <a:tc>
-                  <a:txBody>
-                    <a:bodyPr/>
-                    <a:lstStyle/>
-                    <a:p>
-                      <a:r>
-                        <a:rPr lang="en-US" sz="1200" dirty="0"/>
-                        <a:t>X</a:t>
-                      </a:r>
-                      <a:endParaRPr lang="en-GB" sz="1200" dirty="0"/>
-                    </a:p>
-                  </a:txBody>
-                  <a:tcPr/>
-                </a:tc>
-                <a:extLst>
-                  <a:ext uri="{0D108BD9-81ED-4DB2-BD59-A6C34878D82A}">
-                    <a16:rowId xmlns:a16="http://schemas.microsoft.com/office/drawing/2014/main" val="788774926"/>
+                    <a16:rowId xmlns:a16="http://schemas.microsoft.com/office/drawing/2014/main" val="3739602408"/>
                   </a:ext>
                 </a:extLst>
               </a:tr>
@@ -6976,8 +7386,8 @@
         </p:nvSpPr>
         <p:spPr>
           <a:xfrm>
-            <a:off x="1291458" y="7603951"/>
-            <a:ext cx="2320660" cy="830997"/>
+            <a:off x="524029" y="6402483"/>
+            <a:ext cx="4243406" cy="1569660"/>
           </a:xfrm>
           <a:prstGeom prst="rect">
             <a:avLst/>
@@ -7000,7 +7410,25 @@
                 </a:solidFill>
                 <a:latin typeface="Calibri" panose="020F0502020204030204"/>
               </a:rPr>
-              <a:t>Explain here how you chose the hyper parameter settings to explore and how you ran your experiments.</a:t>
+              <a:t>I trained five different models Logistic Reasoning, Neural Network, gradient boosting, Random Forest, </a:t>
+            </a:r>
+            <a:r>
+              <a:rPr lang="en-US" sz="1200" dirty="0" err="1">
+                <a:solidFill>
+                  <a:prstClr val="black"/>
+                </a:solidFill>
+                <a:latin typeface="Calibri" panose="020F0502020204030204"/>
+              </a:rPr>
+              <a:t>kNN</a:t>
+            </a:r>
+            <a:r>
+              <a:rPr lang="en-US" sz="1200" dirty="0">
+                <a:solidFill>
+                  <a:prstClr val="black"/>
+                </a:solidFill>
+                <a:latin typeface="Calibri" panose="020F0502020204030204"/>
+              </a:rPr>
+              <a:t>. All these models are trained using a 70/30 train-test split. I used F1 score as the validation metric as it balances both precision and recall making it useful when dealing with class imbalance. Gradient boosting was the best performing model. I tuned the hyper parameters for the best performing models to give a better score and ended up with the best performing model.  </a:t>
             </a:r>
             <a:endParaRPr lang="en-GB" sz="1200" dirty="0">
               <a:solidFill>
@@ -7178,8 +7606,8 @@
         </p:nvSpPr>
         <p:spPr>
           <a:xfrm>
-            <a:off x="524029" y="2817537"/>
-            <a:ext cx="3830022" cy="3308598"/>
+            <a:off x="475353" y="2691667"/>
+            <a:ext cx="3830021" cy="3308598"/>
           </a:xfrm>
           <a:prstGeom prst="rect">
             <a:avLst/>
@@ -7254,228 +7682,14 @@
               <a:defRPr/>
             </a:pPr>
             <a:r>
-              <a:rPr kumimoji="0" lang="en-GB" sz="1050" b="0" i="0" u="none" strike="noStrike" kern="1200" cap="none" spc="0" normalizeH="0" baseline="0" noProof="0" dirty="0">
-                <a:ln>
-                  <a:noFill/>
-                </a:ln>
+              <a:rPr lang="en-GB" sz="1200" dirty="0">
                 <a:solidFill>
                   <a:prstClr val="black"/>
                 </a:solidFill>
-                <a:effectLst/>
-                <a:uLnTx/>
-                <a:uFillTx/>
                 <a:latin typeface="Calibri" panose="020F0502020204030204"/>
-                <a:ea typeface="+mn-ea"/>
-                <a:cs typeface="+mn-cs"/>
               </a:rPr>
-              <a:t>Show two histograms here. One should show the distribution of one</a:t>
-            </a:r>
-            <a:endParaRPr lang="en-GB" sz="1050" b="0" i="0" u="none" strike="noStrike" kern="1200" cap="none" spc="0" normalizeH="0" baseline="0" noProof="0" dirty="0">
-              <a:ln>
-                <a:noFill/>
-              </a:ln>
-              <a:solidFill>
-                <a:prstClr val="black"/>
-              </a:solidFill>
-              <a:effectLst/>
-              <a:uLnTx/>
-              <a:uFillTx/>
-              <a:latin typeface="Calibri" panose="020F0502020204030204"/>
-              <a:ea typeface="Calibri"/>
-              <a:cs typeface="Calibri"/>
-            </a:endParaRPr>
-          </a:p>
-          <a:p>
-            <a:pPr marL="0" marR="0" lvl="0" indent="0" algn="l" defTabSz="1706910" rtl="0" eaLnBrk="1" fontAlgn="auto" latinLnBrk="0" hangingPunct="1">
-              <a:lnSpc>
-                <a:spcPct val="100000"/>
-              </a:lnSpc>
-              <a:spcBef>
-                <a:spcPts val="0"/>
-              </a:spcBef>
-              <a:spcAft>
-                <a:spcPts val="0"/>
-              </a:spcAft>
-              <a:buClrTx/>
-              <a:buSzTx/>
-              <a:buFontTx/>
-              <a:buNone/>
-              <a:tabLst/>
-              <a:defRPr/>
-            </a:pPr>
-            <a:r>
-              <a:rPr kumimoji="0" lang="en-GB" sz="1050" b="0" i="0" u="none" strike="noStrike" kern="1200" cap="none" spc="0" normalizeH="0" baseline="0" noProof="0" dirty="0">
-                <a:ln>
-                  <a:noFill/>
-                </a:ln>
-                <a:solidFill>
-                  <a:prstClr val="black"/>
-                </a:solidFill>
-                <a:effectLst/>
-                <a:uLnTx/>
-                <a:uFillTx/>
-                <a:latin typeface="Calibri" panose="020F0502020204030204"/>
-                <a:ea typeface="+mn-ea"/>
-                <a:cs typeface="+mn-cs"/>
-              </a:rPr>
-              <a:t>variable before it has been cleaned. The other should show the</a:t>
-            </a:r>
-            <a:endParaRPr lang="en-GB" sz="1050" b="0" i="0" u="none" strike="noStrike" kern="1200" cap="none" spc="0" normalizeH="0" baseline="0" noProof="0" dirty="0">
-              <a:ln>
-                <a:noFill/>
-              </a:ln>
-              <a:solidFill>
-                <a:prstClr val="black"/>
-              </a:solidFill>
-              <a:effectLst/>
-              <a:uLnTx/>
-              <a:uFillTx/>
-              <a:latin typeface="Calibri" panose="020F0502020204030204"/>
-              <a:ea typeface="Calibri"/>
-              <a:cs typeface="Calibri"/>
-            </a:endParaRPr>
-          </a:p>
-          <a:p>
-            <a:pPr marL="0" marR="0" lvl="0" indent="0" algn="l" defTabSz="1706910" rtl="0" eaLnBrk="1" fontAlgn="auto" latinLnBrk="0" hangingPunct="1">
-              <a:lnSpc>
-                <a:spcPct val="100000"/>
-              </a:lnSpc>
-              <a:spcBef>
-                <a:spcPts val="0"/>
-              </a:spcBef>
-              <a:spcAft>
-                <a:spcPts val="0"/>
-              </a:spcAft>
-              <a:buClrTx/>
-              <a:buSzTx/>
-              <a:buFontTx/>
-              <a:buNone/>
-              <a:tabLst/>
-              <a:defRPr/>
-            </a:pPr>
-            <a:r>
-              <a:rPr kumimoji="0" lang="en-GB" sz="1050" b="0" i="0" u="none" strike="noStrike" kern="1200" cap="none" spc="0" normalizeH="0" baseline="0" noProof="0" dirty="0">
-                <a:ln>
-                  <a:noFill/>
-                </a:ln>
-                <a:solidFill>
-                  <a:prstClr val="black"/>
-                </a:solidFill>
-                <a:effectLst/>
-                <a:uLnTx/>
-                <a:uFillTx/>
-                <a:latin typeface="Calibri" panose="020F0502020204030204"/>
-                <a:ea typeface="+mn-ea"/>
-                <a:cs typeface="+mn-cs"/>
-              </a:rPr>
-              <a:t>distribution of the same variable after cleaning. Choose a variable</a:t>
-            </a:r>
-            <a:endParaRPr lang="en-GB" sz="1050" b="0" i="0" u="none" strike="noStrike" kern="1200" cap="none" spc="0" normalizeH="0" baseline="0" noProof="0" dirty="0">
-              <a:ln>
-                <a:noFill/>
-              </a:ln>
-              <a:solidFill>
-                <a:prstClr val="black"/>
-              </a:solidFill>
-              <a:effectLst/>
-              <a:uLnTx/>
-              <a:uFillTx/>
-              <a:latin typeface="Calibri" panose="020F0502020204030204"/>
-              <a:ea typeface="Calibri"/>
-              <a:cs typeface="Calibri"/>
-            </a:endParaRPr>
-          </a:p>
-          <a:p>
-            <a:pPr marL="0" marR="0" lvl="0" indent="0" algn="l" defTabSz="1706910" rtl="0" eaLnBrk="1" fontAlgn="auto" latinLnBrk="0" hangingPunct="1">
-              <a:lnSpc>
-                <a:spcPct val="100000"/>
-              </a:lnSpc>
-              <a:spcBef>
-                <a:spcPts val="0"/>
-              </a:spcBef>
-              <a:spcAft>
-                <a:spcPts val="0"/>
-              </a:spcAft>
-              <a:buClrTx/>
-              <a:buSzTx/>
-              <a:buFontTx/>
-              <a:buNone/>
-              <a:tabLst/>
-              <a:defRPr/>
-            </a:pPr>
-            <a:r>
-              <a:rPr kumimoji="0" lang="en-GB" sz="1050" b="0" i="0" u="none" strike="noStrike" kern="1200" cap="none" spc="0" normalizeH="0" baseline="0" noProof="0" dirty="0">
-                <a:ln>
-                  <a:noFill/>
-                </a:ln>
-                <a:solidFill>
-                  <a:prstClr val="black"/>
-                </a:solidFill>
-                <a:effectLst/>
-                <a:uLnTx/>
-                <a:uFillTx/>
-                <a:latin typeface="Calibri" panose="020F0502020204030204"/>
-                <a:ea typeface="+mn-ea"/>
-                <a:cs typeface="+mn-cs"/>
-              </a:rPr>
-              <a:t>that needs to be </a:t>
-            </a:r>
-            <a:r>
-              <a:rPr kumimoji="0" lang="en-GB" sz="1050" b="0" i="0" u="none" strike="noStrike" kern="1200" cap="none" spc="0" normalizeH="0" baseline="0" noProof="0">
-                <a:ln>
-                  <a:noFill/>
-                </a:ln>
-                <a:solidFill>
-                  <a:prstClr val="black"/>
-                </a:solidFill>
-                <a:effectLst/>
-                <a:uLnTx/>
-                <a:uFillTx/>
-                <a:latin typeface="Calibri" panose="020F0502020204030204"/>
-                <a:ea typeface="+mn-ea"/>
-                <a:cs typeface="+mn-cs"/>
-              </a:rPr>
-              <a:t>cleaned!!    </a:t>
-            </a:r>
-            <a:endParaRPr kumimoji="0" lang="en-GB" sz="1050" b="0" i="0" u="none" strike="noStrike" kern="1200" cap="none" spc="0" normalizeH="0" baseline="0" noProof="0" dirty="0">
-              <a:ln>
-                <a:noFill/>
-              </a:ln>
-              <a:solidFill>
-                <a:prstClr val="black"/>
-              </a:solidFill>
-              <a:effectLst/>
-              <a:uLnTx/>
-              <a:uFillTx/>
-              <a:latin typeface="Calibri" panose="020F0502020204030204"/>
-              <a:ea typeface="+mn-ea"/>
-              <a:cs typeface="+mn-cs"/>
-            </a:endParaRPr>
-          </a:p>
-          <a:p>
-            <a:pPr marL="0" marR="0" lvl="0" indent="0" algn="l" defTabSz="1706910" rtl="0" eaLnBrk="1" fontAlgn="auto" latinLnBrk="0" hangingPunct="1">
-              <a:lnSpc>
-                <a:spcPct val="100000"/>
-              </a:lnSpc>
-              <a:spcBef>
-                <a:spcPts val="0"/>
-              </a:spcBef>
-              <a:spcAft>
-                <a:spcPts val="0"/>
-              </a:spcAft>
-              <a:buClrTx/>
-              <a:buSzTx/>
-              <a:buFontTx/>
-              <a:buNone/>
-              <a:tabLst/>
-              <a:defRPr/>
-            </a:pPr>
-            <a:endParaRPr lang="en-GB" sz="1050" dirty="0">
-              <a:solidFill>
-                <a:prstClr val="black"/>
-              </a:solidFill>
-              <a:latin typeface="Calibri" panose="020F0502020204030204"/>
-            </a:endParaRPr>
+              <a:t>I decided to clean the ISI variable. It initially had a positively skewed graph with many outliers. The histogram on the left shows the variable before cleaning. It is wide and uneven. After removing several outliers the histogram on the right shows much smoother and even distribution. This is done so that the model receives a consistent data and improves the final prediction.  </a:t>
+            </a:r>
           </a:p>
           <a:p>
             <a:pPr marL="0" marR="0" lvl="0" indent="0" algn="l" defTabSz="1706910" rtl="0" eaLnBrk="1" fontAlgn="auto" latinLnBrk="0" hangingPunct="1">
@@ -7555,16 +7769,64 @@
               <a:tabLst/>
               <a:defRPr/>
             </a:pPr>
-            <a:endParaRPr lang="en-GB" sz="1050" b="0" i="0" u="none" strike="noStrike" kern="1200" cap="none" spc="0" normalizeH="0" baseline="0" noProof="0" dirty="0">
-              <a:ln>
-                <a:noFill/>
-              </a:ln>
+            <a:endParaRPr lang="en-GB" sz="1050" dirty="0">
               <a:solidFill>
                 <a:prstClr val="black"/>
               </a:solidFill>
-              <a:effectLst/>
-              <a:uLnTx/>
-              <a:uFillTx/>
+              <a:latin typeface="Calibri" panose="020F0502020204030204"/>
+              <a:ea typeface="Calibri"/>
+              <a:cs typeface="Calibri"/>
+            </a:endParaRPr>
+          </a:p>
+          <a:p>
+            <a:pPr marL="0" marR="0" lvl="0" indent="0" algn="l" defTabSz="1706910" rtl="0" eaLnBrk="1" fontAlgn="auto" latinLnBrk="0" hangingPunct="1">
+              <a:lnSpc>
+                <a:spcPct val="100000"/>
+              </a:lnSpc>
+              <a:spcBef>
+                <a:spcPts val="0"/>
+              </a:spcBef>
+              <a:spcAft>
+                <a:spcPts val="0"/>
+              </a:spcAft>
+              <a:buClrTx/>
+              <a:buSzTx/>
+              <a:buFontTx/>
+              <a:buNone/>
+              <a:tabLst/>
+              <a:defRPr/>
+            </a:pPr>
+            <a:endParaRPr lang="en-GB" sz="1050" dirty="0">
+              <a:solidFill>
+                <a:prstClr val="black"/>
+              </a:solidFill>
+              <a:latin typeface="Calibri" panose="020F0502020204030204"/>
+              <a:ea typeface="Calibri"/>
+              <a:cs typeface="Calibri"/>
+            </a:endParaRPr>
+          </a:p>
+          <a:p>
+            <a:pPr marL="0" marR="0" lvl="0" indent="0" algn="l" defTabSz="1706910" rtl="0" eaLnBrk="1" fontAlgn="auto" latinLnBrk="0" hangingPunct="1">
+              <a:lnSpc>
+                <a:spcPct val="100000"/>
+              </a:lnSpc>
+              <a:spcBef>
+                <a:spcPts val="0"/>
+              </a:spcBef>
+              <a:spcAft>
+                <a:spcPts val="0"/>
+              </a:spcAft>
+              <a:buClrTx/>
+              <a:buSzTx/>
+              <a:buFontTx/>
+              <a:buNone/>
+              <a:tabLst/>
+              <a:defRPr/>
+            </a:pPr>
+            <a:endParaRPr lang="en-GB" sz="1050" dirty="0">
+              <a:solidFill>
+                <a:prstClr val="black"/>
+              </a:solidFill>
               <a:latin typeface="Calibri" panose="020F0502020204030204"/>
               <a:ea typeface="Calibri"/>
               <a:cs typeface="Calibri"/>
@@ -7708,33 +7970,6 @@
               <a:tabLst/>
               <a:defRPr/>
             </a:pPr>
-            <a:endParaRPr lang="en-GB" sz="1050" dirty="0">
-              <a:solidFill>
-                <a:prstClr val="black"/>
-              </a:solidFill>
-              <a:latin typeface="Calibri" panose="020F0502020204030204"/>
-              <a:ea typeface="Calibri"/>
-              <a:cs typeface="Calibri"/>
-            </a:endParaRPr>
-          </a:p>
-          <a:p>
-            <a:pPr marL="0" marR="0" lvl="0" indent="0" algn="l" defTabSz="1706910" rtl="0" eaLnBrk="1" fontAlgn="auto" latinLnBrk="0" hangingPunct="1">
-              <a:lnSpc>
-                <a:spcPct val="100000"/>
-              </a:lnSpc>
-              <a:spcBef>
-                <a:spcPts val="0"/>
-              </a:spcBef>
-              <a:spcAft>
-                <a:spcPts val="0"/>
-              </a:spcAft>
-              <a:buClrTx/>
-              <a:buSzTx/>
-              <a:buFontTx/>
-              <a:buNone/>
-              <a:tabLst/>
-              <a:defRPr/>
-            </a:pPr>
             <a:endParaRPr lang="en-GB" sz="1050" b="0" i="0" u="none" strike="noStrike" kern="1200" cap="none" spc="0" normalizeH="0" baseline="0" noProof="0" dirty="0">
               <a:ln>
                 <a:noFill/>
@@ -7749,164 +7984,6 @@
               <a:ea typeface="Calibri"/>
               <a:cs typeface="Calibri"/>
             </a:endParaRPr>
-          </a:p>
-          <a:p>
-            <a:pPr marL="0" marR="0" lvl="0" indent="0" algn="l" defTabSz="1706910" rtl="0" eaLnBrk="1" fontAlgn="auto" latinLnBrk="0" hangingPunct="1">
-              <a:lnSpc>
-                <a:spcPct val="100000"/>
-              </a:lnSpc>
-              <a:spcBef>
-                <a:spcPts val="0"/>
-              </a:spcBef>
-              <a:spcAft>
-                <a:spcPts val="0"/>
-              </a:spcAft>
-              <a:buClrTx/>
-              <a:buSzTx/>
-              <a:buFontTx/>
-              <a:buNone/>
-              <a:tabLst/>
-              <a:defRPr/>
-            </a:pPr>
-            <a:endParaRPr lang="en-GB" sz="1050" dirty="0">
-              <a:solidFill>
-                <a:prstClr val="black"/>
-              </a:solidFill>
-              <a:latin typeface="Calibri" panose="020F0502020204030204"/>
-              <a:ea typeface="Calibri"/>
-              <a:cs typeface="Calibri"/>
-            </a:endParaRPr>
-          </a:p>
-          <a:p>
-            <a:pPr marL="0" marR="0" lvl="0" indent="0" algn="l" defTabSz="1706910" rtl="0" eaLnBrk="1" fontAlgn="auto" latinLnBrk="0" hangingPunct="1">
-              <a:lnSpc>
-                <a:spcPct val="100000"/>
-              </a:lnSpc>
-              <a:spcBef>
-                <a:spcPts val="0"/>
-              </a:spcBef>
-              <a:spcAft>
-                <a:spcPts val="0"/>
-              </a:spcAft>
-              <a:buClrTx/>
-              <a:buSzTx/>
-              <a:buFontTx/>
-              <a:buNone/>
-              <a:tabLst/>
-              <a:defRPr/>
-            </a:pPr>
-            <a:endParaRPr lang="en-GB" sz="1050" b="0" i="0" u="none" strike="noStrike" kern="1200" cap="none" spc="0" normalizeH="0" baseline="0" noProof="0" dirty="0">
-              <a:ln>
-                <a:noFill/>
-              </a:ln>
-              <a:solidFill>
-                <a:prstClr val="black"/>
-              </a:solidFill>
-              <a:effectLst/>
-              <a:uLnTx/>
-              <a:uFillTx/>
-              <a:latin typeface="Calibri" panose="020F0502020204030204"/>
-              <a:ea typeface="Calibri"/>
-              <a:cs typeface="Calibri"/>
-            </a:endParaRPr>
-          </a:p>
-          <a:p>
-            <a:pPr marL="0" marR="0" lvl="0" indent="0" algn="l" defTabSz="1706910" rtl="0" eaLnBrk="1" fontAlgn="auto" latinLnBrk="0" hangingPunct="1">
-              <a:lnSpc>
-                <a:spcPct val="100000"/>
-              </a:lnSpc>
-              <a:spcBef>
-                <a:spcPts val="0"/>
-              </a:spcBef>
-              <a:spcAft>
-                <a:spcPts val="0"/>
-              </a:spcAft>
-              <a:buClrTx/>
-              <a:buSzTx/>
-              <a:buFontTx/>
-              <a:buNone/>
-              <a:tabLst/>
-              <a:defRPr/>
-            </a:pPr>
-            <a:endParaRPr lang="en-GB" sz="1050" b="0" i="0" u="none" strike="noStrike" kern="1200" cap="none" spc="0" normalizeH="0" baseline="0" noProof="0" dirty="0">
-              <a:ln>
-                <a:noFill/>
-              </a:ln>
-              <a:solidFill>
-                <a:prstClr val="black"/>
-              </a:solidFill>
-              <a:effectLst/>
-              <a:uLnTx/>
-              <a:uFillTx/>
-              <a:latin typeface="Calibri" panose="020F0502020204030204"/>
-              <a:ea typeface="Calibri"/>
-              <a:cs typeface="Calibri"/>
-            </a:endParaRPr>
-          </a:p>
-        </p:txBody>
-      </p:sp>
-      <p:sp>
-        <p:nvSpPr>
-          <p:cNvPr id="22" name="TextBox 21">
-            <a:extLst>
-              <a:ext uri="{FF2B5EF4-FFF2-40B4-BE49-F238E27FC236}">
-                <a16:creationId xmlns:a16="http://schemas.microsoft.com/office/drawing/2014/main" id="{A963A857-22CD-BC85-9293-B211890D5A3A}"/>
-              </a:ext>
-            </a:extLst>
-          </p:cNvPr>
-          <p:cNvSpPr txBox="1"/>
-          <p:nvPr/>
-        </p:nvSpPr>
-        <p:spPr>
-          <a:xfrm>
-            <a:off x="4914384" y="9812406"/>
-            <a:ext cx="4178298" cy="253916"/>
-          </a:xfrm>
-          <a:prstGeom prst="rect">
-            <a:avLst/>
-          </a:prstGeom>
-          <a:noFill/>
-        </p:spPr>
-        <p:txBody>
-          <a:bodyPr wrap="square" lIns="91440" tIns="45720" rIns="91440" bIns="45720" anchor="t">
-            <a:spAutoFit/>
-          </a:bodyPr>
-          <a:lstStyle/>
-          <a:p>
-            <a:pPr marL="0" marR="0" lvl="0" indent="0" algn="l" defTabSz="1706910" rtl="0" eaLnBrk="1" fontAlgn="auto" latinLnBrk="0" hangingPunct="1">
-              <a:lnSpc>
-                <a:spcPct val="100000"/>
-              </a:lnSpc>
-              <a:spcBef>
-                <a:spcPts val="0"/>
-              </a:spcBef>
-              <a:spcAft>
-                <a:spcPts val="0"/>
-              </a:spcAft>
-              <a:buClrTx/>
-              <a:buSzTx/>
-              <a:buFontTx/>
-              <a:buNone/>
-              <a:tabLst/>
-              <a:defRPr/>
-            </a:pPr>
-            <a:r>
-              <a:rPr kumimoji="0" lang="en-GB" sz="1050" b="0" i="0" u="none" strike="noStrike" kern="1200" cap="none" spc="0" normalizeH="0" baseline="0" noProof="0" dirty="0">
-                <a:ln>
-                  <a:noFill/>
-                </a:ln>
-                <a:solidFill>
-                  <a:prstClr val="black"/>
-                </a:solidFill>
-                <a:effectLst/>
-                <a:uLnTx/>
-                <a:uFillTx/>
-                <a:latin typeface="Calibri" panose="020F0502020204030204"/>
-                <a:ea typeface="+mn-ea"/>
-                <a:cs typeface="+mn-cs"/>
-              </a:rPr>
-              <a:t>Explain what the confusion matrix tells us.</a:t>
-            </a:r>
           </a:p>
         </p:txBody>
       </p:sp>
@@ -7924,7 +8001,7 @@
         </p:nvSpPr>
         <p:spPr>
           <a:xfrm>
-            <a:off x="524029" y="10977048"/>
+            <a:off x="540612" y="10404012"/>
             <a:ext cx="8847947" cy="923330"/>
           </a:xfrm>
           <a:prstGeom prst="rect">
@@ -8049,14 +8126,14 @@
           <p:nvPr>
             <p:extLst>
               <p:ext uri="{D42A27DB-BD31-4B8C-83A1-F6EECF244321}">
-                <p14:modId xmlns:p14="http://schemas.microsoft.com/office/powerpoint/2010/main" val="3052331238"/>
+                <p14:modId xmlns:p14="http://schemas.microsoft.com/office/powerpoint/2010/main" val="1664028388"/>
               </p:ext>
             </p:extLst>
           </p:nvPr>
         </p:nvGraphicFramePr>
         <p:xfrm>
           <a:off x="4775726" y="1392092"/>
-          <a:ext cx="4116658" cy="1571469"/>
+          <a:ext cx="4116659" cy="1879698"/>
         </p:xfrm>
         <a:graphic>
           <a:graphicData uri="http://schemas.openxmlformats.org/drawingml/2006/table">
@@ -8065,17 +8142,24 @@
                 <a:tableStyleId>{5C22544A-7EE6-4342-B048-85BDC9FD1C3A}</a:tableStyleId>
               </a:tblPr>
               <a:tblGrid>
-                <a:gridCol w="1573823">
+                <a:gridCol w="972881">
                   <a:extLst>
                     <a:ext uri="{9D8B030D-6E8A-4147-A177-3AD203B41FA5}">
                       <a16:colId xmlns:a16="http://schemas.microsoft.com/office/drawing/2014/main" val="4277499917"/>
                     </a:ext>
                   </a:extLst>
                 </a:gridCol>
-                <a:gridCol w="2542835">
+                <a:gridCol w="1571889">
                   <a:extLst>
                     <a:ext uri="{9D8B030D-6E8A-4147-A177-3AD203B41FA5}">
                       <a16:colId xmlns:a16="http://schemas.microsoft.com/office/drawing/2014/main" val="3438916551"/>
+                    </a:ext>
+                  </a:extLst>
+                </a:gridCol>
+                <a:gridCol w="1571889">
+                  <a:extLst>
+                    <a:ext uri="{9D8B030D-6E8A-4147-A177-3AD203B41FA5}">
+                      <a16:colId xmlns:a16="http://schemas.microsoft.com/office/drawing/2014/main" val="2670052056"/>
                     </a:ext>
                   </a:extLst>
                 </a:gridCol>
@@ -8104,6 +8188,20 @@
                       <a:r>
                         <a:rPr lang="en-US" sz="1200" dirty="0"/>
                         <a:t>type</a:t>
+                      </a:r>
+                    </a:p>
+                  </a:txBody>
+                  <a:tcPr/>
+                </a:tc>
+                <a:tc>
+                  <a:txBody>
+                    <a:bodyPr/>
+                    <a:lstStyle/>
+                    <a:p>
+                      <a:pPr algn="ctr"/>
+                      <a:r>
+                        <a:rPr lang="en-US" sz="1200" dirty="0"/>
+                        <a:t>Used in model </a:t>
                       </a:r>
                     </a:p>
                   </a:txBody>
@@ -8144,6 +8242,20 @@
                   </a:txBody>
                   <a:tcPr/>
                 </a:tc>
+                <a:tc>
+                  <a:txBody>
+                    <a:bodyPr/>
+                    <a:lstStyle/>
+                    <a:p>
+                      <a:pPr algn="ctr"/>
+                      <a:r>
+                        <a:rPr lang="en-US" sz="1200" dirty="0"/>
+                        <a:t>Yes </a:t>
+                      </a:r>
+                    </a:p>
+                  </a:txBody>
+                  <a:tcPr/>
+                </a:tc>
                 <a:extLst>
                   <a:ext uri="{0D108BD9-81ED-4DB2-BD59-A6C34878D82A}">
                     <a16:rowId xmlns:a16="http://schemas.microsoft.com/office/drawing/2014/main" val="435795259"/>
@@ -8173,7 +8285,21 @@
                       <a:pPr algn="ctr"/>
                       <a:r>
                         <a:rPr lang="en-US" sz="1200" dirty="0"/>
-                        <a:t>Numeric (continuous )</a:t>
+                        <a:t>Numeric (continuous)</a:t>
+                      </a:r>
+                    </a:p>
+                  </a:txBody>
+                  <a:tcPr/>
+                </a:tc>
+                <a:tc>
+                  <a:txBody>
+                    <a:bodyPr/>
+                    <a:lstStyle/>
+                    <a:p>
+                      <a:pPr algn="ctr"/>
+                      <a:r>
+                        <a:rPr lang="en-US" sz="1200" dirty="0"/>
+                        <a:t>Yes</a:t>
                       </a:r>
                     </a:p>
                   </a:txBody>
@@ -8214,6 +8340,20 @@
                   </a:txBody>
                   <a:tcPr/>
                 </a:tc>
+                <a:tc>
+                  <a:txBody>
+                    <a:bodyPr/>
+                    <a:lstStyle/>
+                    <a:p>
+                      <a:pPr algn="ctr"/>
+                      <a:r>
+                        <a:rPr lang="en-US" sz="1200" dirty="0"/>
+                        <a:t>Yes (target)</a:t>
+                      </a:r>
+                    </a:p>
+                  </a:txBody>
+                  <a:tcPr/>
+                </a:tc>
                 <a:extLst>
                   <a:ext uri="{0D108BD9-81ED-4DB2-BD59-A6C34878D82A}">
                     <a16:rowId xmlns:a16="http://schemas.microsoft.com/office/drawing/2014/main" val="458789843"/>
@@ -8224,6 +8364,96 @@
           </a:graphicData>
         </a:graphic>
       </p:graphicFrame>
+      <p:pic>
+        <p:nvPicPr>
+          <p:cNvPr id="25" name="Picture 24">
+            <a:extLst>
+              <a:ext uri="{FF2B5EF4-FFF2-40B4-BE49-F238E27FC236}">
+                <a16:creationId xmlns:a16="http://schemas.microsoft.com/office/drawing/2014/main" id="{43405D93-607C-0148-A3D5-AC6B7C7C1624}"/>
+              </a:ext>
+            </a:extLst>
+          </p:cNvPr>
+          <p:cNvPicPr>
+            <a:picLocks noChangeAspect="1"/>
+          </p:cNvPicPr>
+          <p:nvPr/>
+        </p:nvPicPr>
+        <p:blipFill>
+          <a:blip r:embed="rId3"/>
+          <a:stretch>
+            <a:fillRect/>
+          </a:stretch>
+        </p:blipFill>
+        <p:spPr>
+          <a:xfrm>
+            <a:off x="2390363" y="4416527"/>
+            <a:ext cx="1835673" cy="1488996"/>
+          </a:xfrm>
+          <a:prstGeom prst="rect">
+            <a:avLst/>
+          </a:prstGeom>
+        </p:spPr>
+      </p:pic>
+      <p:pic>
+        <p:nvPicPr>
+          <p:cNvPr id="26" name="Picture 25">
+            <a:extLst>
+              <a:ext uri="{FF2B5EF4-FFF2-40B4-BE49-F238E27FC236}">
+                <a16:creationId xmlns:a16="http://schemas.microsoft.com/office/drawing/2014/main" id="{9AC0C565-3A47-0652-68D9-F9E0C11AAC82}"/>
+              </a:ext>
+            </a:extLst>
+          </p:cNvPr>
+          <p:cNvPicPr>
+            <a:picLocks noChangeAspect="1"/>
+          </p:cNvPicPr>
+          <p:nvPr/>
+        </p:nvPicPr>
+        <p:blipFill>
+          <a:blip r:embed="rId4"/>
+          <a:stretch>
+            <a:fillRect/>
+          </a:stretch>
+        </p:blipFill>
+        <p:spPr>
+          <a:xfrm>
+            <a:off x="540612" y="4406612"/>
+            <a:ext cx="1804216" cy="1508826"/>
+          </a:xfrm>
+          <a:prstGeom prst="rect">
+            <a:avLst/>
+          </a:prstGeom>
+        </p:spPr>
+      </p:pic>
+      <p:pic>
+        <p:nvPicPr>
+          <p:cNvPr id="27" name="Picture 26">
+            <a:extLst>
+              <a:ext uri="{FF2B5EF4-FFF2-40B4-BE49-F238E27FC236}">
+                <a16:creationId xmlns:a16="http://schemas.microsoft.com/office/drawing/2014/main" id="{8F87CD58-E062-CDF4-F810-D0A5DF2329AC}"/>
+              </a:ext>
+            </a:extLst>
+          </p:cNvPr>
+          <p:cNvPicPr>
+            <a:picLocks noChangeAspect="1"/>
+          </p:cNvPicPr>
+          <p:nvPr/>
+        </p:nvPicPr>
+        <p:blipFill>
+          <a:blip r:embed="rId5"/>
+          <a:stretch>
+            <a:fillRect/>
+          </a:stretch>
+        </p:blipFill>
+        <p:spPr>
+          <a:xfrm>
+            <a:off x="6084448" y="8337661"/>
+            <a:ext cx="3158745" cy="1822020"/>
+          </a:xfrm>
+          <a:prstGeom prst="rect">
+            <a:avLst/>
+          </a:prstGeom>
+        </p:spPr>
+      </p:pic>
     </p:spTree>
     <p:extLst>
       <p:ext uri="{BB962C8B-B14F-4D97-AF65-F5344CB8AC3E}">
@@ -8297,10 +8527,61 @@
         </p:nvSpPr>
         <p:spPr/>
         <p:txBody>
-          <a:bodyPr/>
+          <a:bodyPr>
+            <a:normAutofit/>
+          </a:bodyPr>
           <a:lstStyle/>
           <a:p>
-            <a:endParaRPr lang="en-US"/>
+            <a:r>
+              <a:rPr lang="en-GB" sz="1600" dirty="0"/>
+              <a:t>or each learner widget:</a:t>
+            </a:r>
+          </a:p>
+          <a:p>
+            <a:r>
+              <a:rPr lang="en-GB" sz="1600" dirty="0"/>
+              <a:t>Open the widget.</a:t>
+            </a:r>
+          </a:p>
+          <a:p>
+            <a:r>
+              <a:rPr lang="en-GB" sz="1600" dirty="0"/>
+              <a:t>Change one hyperparameter (e.g.:</a:t>
+            </a:r>
+          </a:p>
+          <a:p>
+            <a:pPr lvl="1"/>
+            <a:r>
+              <a:rPr lang="en-GB" sz="1600" dirty="0" err="1"/>
+              <a:t>kNN</a:t>
+            </a:r>
+            <a:r>
+              <a:rPr lang="en-GB" sz="1600" dirty="0"/>
+              <a:t>: change k = 3, 5, 7</a:t>
+            </a:r>
+          </a:p>
+          <a:p>
+            <a:pPr lvl="1"/>
+            <a:r>
+              <a:rPr lang="en-GB" sz="1600" dirty="0"/>
+              <a:t>Random Forest: number of trees = 10, 50, 100</a:t>
+            </a:r>
+          </a:p>
+          <a:p>
+            <a:pPr lvl="1"/>
+            <a:r>
+              <a:rPr lang="en-GB" sz="1600" dirty="0"/>
+              <a:t>Gradient Boosting: number of trees/iterations</a:t>
+            </a:r>
+          </a:p>
+          <a:p>
+            <a:r>
+              <a:rPr lang="en-GB" sz="1600" dirty="0"/>
+              <a:t>After each change, check Test &amp; Score and record the metric.</a:t>
+            </a:r>
+          </a:p>
+          <a:p>
+            <a:endParaRPr lang="en-US" dirty="0"/>
           </a:p>
         </p:txBody>
       </p:sp>
@@ -8612,6 +8893,321 @@
 </a:theme>
 </file>
 
+<file path=ppt/theme/theme2.xml><?xml version="1.0" encoding="utf-8"?>
+<a:theme xmlns:a="http://schemas.openxmlformats.org/drawingml/2006/main" name="Office Theme">
+  <a:themeElements>
+    <a:clrScheme name="Office">
+      <a:dk1>
+        <a:sysClr val="windowText" lastClr="000000"/>
+      </a:dk1>
+      <a:lt1>
+        <a:sysClr val="window" lastClr="FFFFFF"/>
+      </a:lt1>
+      <a:dk2>
+        <a:srgbClr val="0E2841"/>
+      </a:dk2>
+      <a:lt2>
+        <a:srgbClr val="E8E8E8"/>
+      </a:lt2>
+      <a:accent1>
+        <a:srgbClr val="156082"/>
+      </a:accent1>
+      <a:accent2>
+        <a:srgbClr val="E97132"/>
+      </a:accent2>
+      <a:accent3>
+        <a:srgbClr val="196B24"/>
+      </a:accent3>
+      <a:accent4>
+        <a:srgbClr val="0F9ED5"/>
+      </a:accent4>
+      <a:accent5>
+        <a:srgbClr val="A02B93"/>
+      </a:accent5>
+      <a:accent6>
+        <a:srgbClr val="4EA72E"/>
+      </a:accent6>
+      <a:hlink>
+        <a:srgbClr val="467886"/>
+      </a:hlink>
+      <a:folHlink>
+        <a:srgbClr val="96607D"/>
+      </a:folHlink>
+    </a:clrScheme>
+    <a:fontScheme name="Office">
+      <a:majorFont>
+        <a:latin typeface="Aptos Display" panose="02110004020202020204"/>
+        <a:ea typeface=""/>
+        <a:cs typeface=""/>
+        <a:font script="Jpan" typeface="游ゴシック Light"/>
+        <a:font script="Hang" typeface="맑은 고딕"/>
+        <a:font script="Hans" typeface="等线 Light"/>
+        <a:font script="Hant" typeface="新細明體"/>
+        <a:font script="Arab" typeface="Times New Roman"/>
+        <a:font script="Hebr" typeface="Times New Roman"/>
+        <a:font script="Thai" typeface="Angsana New"/>
+        <a:font script="Ethi" typeface="Nyala"/>
+        <a:font script="Beng" typeface="Vrinda"/>
+        <a:font script="Gujr" typeface="Shruti"/>
+        <a:font script="Khmr" typeface="MoolBoran"/>
+        <a:font script="Knda" typeface="Tunga"/>
+        <a:font script="Guru" typeface="Raavi"/>
+        <a:font script="Cans" typeface="Euphemia"/>
+        <a:font script="Cher" typeface="Plantagenet Cherokee"/>
+        <a:font script="Yiii" typeface="Microsoft Yi Baiti"/>
+        <a:font script="Tibt" typeface="Microsoft Himalaya"/>
+        <a:font script="Thaa" typeface="MV Boli"/>
+        <a:font script="Deva" typeface="Mangal"/>
+        <a:font script="Telu" typeface="Gautami"/>
+        <a:font script="Taml" typeface="Latha"/>
+        <a:font script="Syrc" typeface="Estrangelo Edessa"/>
+        <a:font script="Orya" typeface="Kalinga"/>
+        <a:font script="Mlym" typeface="Kartika"/>
+        <a:font script="Laoo" typeface="DokChampa"/>
+        <a:font script="Sinh" typeface="Iskoola Pota"/>
+        <a:font script="Mong" typeface="Mongolian Baiti"/>
+        <a:font script="Viet" typeface="Times New Roman"/>
+        <a:font script="Uigh" typeface="Microsoft Uighur"/>
+        <a:font script="Geor" typeface="Sylfaen"/>
+        <a:font script="Armn" typeface="Arial"/>
+        <a:font script="Bugi" typeface="Leelawadee UI"/>
+        <a:font script="Bopo" typeface="Microsoft JhengHei"/>
+        <a:font script="Java" typeface="Javanese Text"/>
+        <a:font script="Lisu" typeface="Segoe UI"/>
+        <a:font script="Mymr" typeface="Myanmar Text"/>
+        <a:font script="Nkoo" typeface="Ebrima"/>
+        <a:font script="Olck" typeface="Nirmala UI"/>
+        <a:font script="Osma" typeface="Ebrima"/>
+        <a:font script="Phag" typeface="Phagspa"/>
+        <a:font script="Syrn" typeface="Estrangelo Edessa"/>
+        <a:font script="Syrj" typeface="Estrangelo Edessa"/>
+        <a:font script="Syre" typeface="Estrangelo Edessa"/>
+        <a:font script="Sora" typeface="Nirmala UI"/>
+        <a:font script="Tale" typeface="Microsoft Tai Le"/>
+        <a:font script="Talu" typeface="Microsoft New Tai Lue"/>
+        <a:font script="Tfng" typeface="Ebrima"/>
+      </a:majorFont>
+      <a:minorFont>
+        <a:latin typeface="Aptos" panose="02110004020202020204"/>
+        <a:ea typeface=""/>
+        <a:cs typeface=""/>
+        <a:font script="Jpan" typeface="游ゴシック"/>
+        <a:font script="Hang" typeface="맑은 고딕"/>
+        <a:font script="Hans" typeface="等线"/>
+        <a:font script="Hant" typeface="新細明體"/>
+        <a:font script="Arab" typeface="Arial"/>
+        <a:font script="Hebr" typeface="Arial"/>
+        <a:font script="Thai" typeface="Cordia New"/>
+        <a:font script="Ethi" typeface="Nyala"/>
+        <a:font script="Beng" typeface="Vrinda"/>
+        <a:font script="Gujr" typeface="Shruti"/>
+        <a:font script="Khmr" typeface="DaunPenh"/>
+        <a:font script="Knda" typeface="Tunga"/>
+        <a:font script="Guru" typeface="Raavi"/>
+        <a:font script="Cans" typeface="Euphemia"/>
+        <a:font script="Cher" typeface="Plantagenet Cherokee"/>
+        <a:font script="Yiii" typeface="Microsoft Yi Baiti"/>
+        <a:font script="Tibt" typeface="Microsoft Himalaya"/>
+        <a:font script="Thaa" typeface="MV Boli"/>
+        <a:font script="Deva" typeface="Mangal"/>
+        <a:font script="Telu" typeface="Gautami"/>
+        <a:font script="Taml" typeface="Latha"/>
+        <a:font script="Syrc" typeface="Estrangelo Edessa"/>
+        <a:font script="Orya" typeface="Kalinga"/>
+        <a:font script="Mlym" typeface="Kartika"/>
+        <a:font script="Laoo" typeface="DokChampa"/>
+        <a:font script="Sinh" typeface="Iskoola Pota"/>
+        <a:font script="Mong" typeface="Mongolian Baiti"/>
+        <a:font script="Viet" typeface="Arial"/>
+        <a:font script="Uigh" typeface="Microsoft Uighur"/>
+        <a:font script="Geor" typeface="Sylfaen"/>
+        <a:font script="Armn" typeface="Arial"/>
+        <a:font script="Bugi" typeface="Leelawadee UI"/>
+        <a:font script="Bopo" typeface="Microsoft JhengHei"/>
+        <a:font script="Java" typeface="Javanese Text"/>
+        <a:font script="Lisu" typeface="Segoe UI"/>
+        <a:font script="Mymr" typeface="Myanmar Text"/>
+        <a:font script="Nkoo" typeface="Ebrima"/>
+        <a:font script="Olck" typeface="Nirmala UI"/>
+        <a:font script="Osma" typeface="Ebrima"/>
+        <a:font script="Phag" typeface="Phagspa"/>
+        <a:font script="Syrn" typeface="Estrangelo Edessa"/>
+        <a:font script="Syrj" typeface="Estrangelo Edessa"/>
+        <a:font script="Syre" typeface="Estrangelo Edessa"/>
+        <a:font script="Sora" typeface="Nirmala UI"/>
+        <a:font script="Tale" typeface="Microsoft Tai Le"/>
+        <a:font script="Talu" typeface="Microsoft New Tai Lue"/>
+        <a:font script="Tfng" typeface="Ebrima"/>
+      </a:minorFont>
+    </a:fontScheme>
+    <a:fmtScheme name="Office">
+      <a:fillStyleLst>
+        <a:solidFill>
+          <a:schemeClr val="phClr"/>
+        </a:solidFill>
+        <a:gradFill rotWithShape="1">
+          <a:gsLst>
+            <a:gs pos="0">
+              <a:schemeClr val="phClr">
+                <a:lumMod val="110000"/>
+                <a:satMod val="105000"/>
+                <a:tint val="67000"/>
+              </a:schemeClr>
+            </a:gs>
+            <a:gs pos="50000">
+              <a:schemeClr val="phClr">
+                <a:lumMod val="105000"/>
+                <a:satMod val="103000"/>
+                <a:tint val="73000"/>
+              </a:schemeClr>
+            </a:gs>
+            <a:gs pos="100000">
+              <a:schemeClr val="phClr">
+                <a:lumMod val="105000"/>
+                <a:satMod val="109000"/>
+                <a:tint val="81000"/>
+              </a:schemeClr>
+            </a:gs>
+          </a:gsLst>
+          <a:lin ang="5400000" scaled="0"/>
+        </a:gradFill>
+        <a:gradFill rotWithShape="1">
+          <a:gsLst>
+            <a:gs pos="0">
+              <a:schemeClr val="phClr">
+                <a:satMod val="103000"/>
+                <a:lumMod val="102000"/>
+                <a:tint val="94000"/>
+              </a:schemeClr>
+            </a:gs>
+            <a:gs pos="50000">
+              <a:schemeClr val="phClr">
+                <a:satMod val="110000"/>
+                <a:lumMod val="100000"/>
+                <a:shade val="100000"/>
+              </a:schemeClr>
+            </a:gs>
+            <a:gs pos="100000">
+              <a:schemeClr val="phClr">
+                <a:lumMod val="99000"/>
+                <a:satMod val="120000"/>
+                <a:shade val="78000"/>
+              </a:schemeClr>
+            </a:gs>
+          </a:gsLst>
+          <a:lin ang="5400000" scaled="0"/>
+        </a:gradFill>
+      </a:fillStyleLst>
+      <a:lnStyleLst>
+        <a:ln w="12700" cap="flat" cmpd="sng" algn="ctr">
+          <a:solidFill>
+            <a:schemeClr val="phClr"/>
+          </a:solidFill>
+          <a:prstDash val="solid"/>
+          <a:miter lim="800000"/>
+        </a:ln>
+        <a:ln w="19050" cap="flat" cmpd="sng" algn="ctr">
+          <a:solidFill>
+            <a:schemeClr val="phClr"/>
+          </a:solidFill>
+          <a:prstDash val="solid"/>
+          <a:miter lim="800000"/>
+        </a:ln>
+        <a:ln w="25400" cap="flat" cmpd="sng" algn="ctr">
+          <a:solidFill>
+            <a:schemeClr val="phClr"/>
+          </a:solidFill>
+          <a:prstDash val="solid"/>
+          <a:miter lim="800000"/>
+        </a:ln>
+      </a:lnStyleLst>
+      <a:effectStyleLst>
+        <a:effectStyle>
+          <a:effectLst/>
+        </a:effectStyle>
+        <a:effectStyle>
+          <a:effectLst/>
+        </a:effectStyle>
+        <a:effectStyle>
+          <a:effectLst>
+            <a:outerShdw blurRad="57150" dist="19050" dir="5400000" algn="ctr" rotWithShape="0">
+              <a:srgbClr val="000000">
+                <a:alpha val="63000"/>
+              </a:srgbClr>
+            </a:outerShdw>
+          </a:effectLst>
+        </a:effectStyle>
+      </a:effectStyleLst>
+      <a:bgFillStyleLst>
+        <a:solidFill>
+          <a:schemeClr val="phClr"/>
+        </a:solidFill>
+        <a:solidFill>
+          <a:schemeClr val="phClr">
+            <a:tint val="95000"/>
+            <a:satMod val="170000"/>
+          </a:schemeClr>
+        </a:solidFill>
+        <a:gradFill rotWithShape="1">
+          <a:gsLst>
+            <a:gs pos="0">
+              <a:schemeClr val="phClr">
+                <a:tint val="93000"/>
+                <a:satMod val="150000"/>
+                <a:shade val="98000"/>
+                <a:lumMod val="102000"/>
+              </a:schemeClr>
+            </a:gs>
+            <a:gs pos="50000">
+              <a:schemeClr val="phClr">
+                <a:tint val="98000"/>
+                <a:satMod val="130000"/>
+                <a:shade val="90000"/>
+                <a:lumMod val="103000"/>
+              </a:schemeClr>
+            </a:gs>
+            <a:gs pos="100000">
+              <a:schemeClr val="phClr">
+                <a:shade val="63000"/>
+                <a:satMod val="120000"/>
+              </a:schemeClr>
+            </a:gs>
+          </a:gsLst>
+          <a:lin ang="5400000" scaled="0"/>
+        </a:gradFill>
+      </a:bgFillStyleLst>
+    </a:fmtScheme>
+  </a:themeElements>
+  <a:objectDefaults>
+    <a:lnDef>
+      <a:spPr/>
+      <a:bodyPr/>
+      <a:lstStyle/>
+      <a:style>
+        <a:lnRef idx="2">
+          <a:schemeClr val="accent1"/>
+        </a:lnRef>
+        <a:fillRef idx="0">
+          <a:schemeClr val="accent1"/>
+        </a:fillRef>
+        <a:effectRef idx="1">
+          <a:schemeClr val="accent1"/>
+        </a:effectRef>
+        <a:fontRef idx="minor">
+          <a:schemeClr val="tx1"/>
+        </a:fontRef>
+      </a:style>
+    </a:lnDef>
+  </a:objectDefaults>
+  <a:extraClrSchemeLst/>
+  <a:extLst>
+    <a:ext uri="{05A4C25C-085E-4340-85A3-A5531E510DB2}">
+      <thm15:themeFamily xmlns:thm15="http://schemas.microsoft.com/office/thememl/2012/main" name="Office Theme" id="{2E142A2C-CD16-42D6-873A-C26D2A0506FA}" vid="{1BDDFF52-6CD6-40A5-AB3C-68EB2F1E4D0A}"/>
+    </a:ext>
+  </a:extLst>
+</a:theme>
+</file>
+
 <file path=customXml/item1.xml><?xml version="1.0" encoding="utf-8"?>
 <?mso-contentType ?>
 <FormTemplates xmlns="http://schemas.microsoft.com/sharepoint/v3/contenttype/forms">
